--- a/ScrumFirst_Presentation.pptx
+++ b/ScrumFirst_Presentation.pptx
@@ -11,7 +11,6 @@
     <p:sldId id="259" r:id="rId10"/>
     <p:sldId id="260" r:id="rId11"/>
     <p:sldId id="261" r:id="rId12"/>
-    <p:sldId id="262" r:id="rId13"/>
   </p:sldIdLst>
   <p:sldSz cx="12191695" cy="6858000" type="screen4x3"/>
   <p:notesSz cx="6858000" cy="9144000"/>
@@ -3090,7 +3089,7 @@
     <p:bg>
       <p:bgPr>
         <a:solidFill>
-          <a:srgbClr val="2C3E50"/>
+          <a:srgbClr val="F7F6F0"/>
         </a:solidFill>
         <a:effectLst/>
       </p:bgPr>
@@ -3111,17 +3110,18 @@
         <p:spPr>
           <a:xfrm>
             <a:off x="0" y="0"/>
-            <a:ext cx="12191695" cy="101600"/>
+            <a:ext cx="12191695" cy="201168"/>
           </a:xfrm>
           <a:prstGeom prst="rect">
             <a:avLst/>
           </a:prstGeom>
           <a:solidFill>
-            <a:srgbClr val="2C6FEA"/>
+            <a:srgbClr val="0F172A"/>
           </a:solidFill>
           <a:ln>
             <a:noFill/>
           </a:ln>
+          <a:effectLst/>
         </p:spPr>
         <p:style>
           <a:lnRef idx="1">
@@ -3153,18 +3153,19 @@
         </p:nvSpPr>
         <p:spPr>
           <a:xfrm>
-            <a:off x="731520" y="1371600"/>
-            <a:ext cx="76200" cy="4114800"/>
+            <a:off x="0" y="6656832"/>
+            <a:ext cx="12191695" cy="201168"/>
           </a:xfrm>
           <a:prstGeom prst="rect">
             <a:avLst/>
           </a:prstGeom>
           <a:solidFill>
-            <a:srgbClr val="2C6FEA"/>
+            <a:srgbClr val="0F172A"/>
           </a:solidFill>
           <a:ln>
             <a:noFill/>
           </a:ln>
+          <a:effectLst/>
         </p:spPr>
         <p:style>
           <a:lnRef idx="1">
@@ -3190,96 +3191,25 @@
       </p:sp>
       <p:sp>
         <p:nvSpPr>
-          <p:cNvPr id="4" name="TextBox 3"/>
-          <p:cNvSpPr txBox="1"/>
-          <p:nvPr/>
-        </p:nvSpPr>
-        <p:spPr>
-          <a:xfrm>
-            <a:off x="1097280" y="1645920"/>
-            <a:ext cx="9144000" cy="1371600"/>
-          </a:xfrm>
-          <a:prstGeom prst="rect">
-            <a:avLst/>
-          </a:prstGeom>
-          <a:noFill/>
-        </p:spPr>
-        <p:txBody>
-          <a:bodyPr wrap="square">
-            <a:spAutoFit/>
-          </a:bodyPr>
-          <a:lstStyle/>
-          <a:p>
-            <a:pPr algn="l">
-              <a:defRPr sz="5200" b="1">
-                <a:solidFill>
-                  <a:srgbClr val="FFFFFF"/>
-                </a:solidFill>
-                <a:latin typeface="Calibri Light"/>
-              </a:defRPr>
-            </a:pPr>
-            <a:r>
-              <a:t>ScrumFirst</a:t>
-            </a:r>
-          </a:p>
-        </p:txBody>
-      </p:sp>
-      <p:sp>
-        <p:nvSpPr>
-          <p:cNvPr id="5" name="TextBox 4"/>
-          <p:cNvSpPr txBox="1"/>
-          <p:nvPr/>
-        </p:nvSpPr>
-        <p:spPr>
-          <a:xfrm>
-            <a:off x="1097280" y="3017520"/>
-            <a:ext cx="9144000" cy="914400"/>
-          </a:xfrm>
-          <a:prstGeom prst="rect">
-            <a:avLst/>
-          </a:prstGeom>
-          <a:noFill/>
-        </p:spPr>
-        <p:txBody>
-          <a:bodyPr wrap="square">
-            <a:spAutoFit/>
-          </a:bodyPr>
-          <a:lstStyle/>
-          <a:p>
-            <a:pPr algn="l">
-              <a:defRPr sz="2400" b="0">
-                <a:solidFill>
-                  <a:srgbClr val="F5E6D6"/>
-                </a:solidFill>
-                <a:latin typeface="Calibri"/>
-              </a:defRPr>
-            </a:pPr>
-            <a:r>
-              <a:t>Suivi Scrum natif pour Next.js · Prisma · PostgreSQL</a:t>
-            </a:r>
-          </a:p>
-        </p:txBody>
-      </p:sp>
-      <p:sp>
-        <p:nvSpPr>
-          <p:cNvPr id="6" name="Rectangle 5"/>
+          <p:cNvPr id="4" name="Rectangle 3"/>
           <p:cNvSpPr/>
           <p:nvPr/>
         </p:nvSpPr>
         <p:spPr>
           <a:xfrm>
-            <a:off x="1097280" y="4114800"/>
-            <a:ext cx="2743200" cy="38100"/>
+            <a:off x="1005840" y="2057400"/>
+            <a:ext cx="1554480" cy="38000"/>
           </a:xfrm>
           <a:prstGeom prst="rect">
             <a:avLst/>
           </a:prstGeom>
           <a:solidFill>
-            <a:srgbClr val="F5E6D6"/>
+            <a:srgbClr val="0F172A"/>
           </a:solidFill>
           <a:ln>
             <a:noFill/>
           </a:ln>
+          <a:effectLst/>
         </p:spPr>
         <p:style>
           <a:lnRef idx="1">
@@ -3305,14 +3235,14 @@
       </p:sp>
       <p:sp>
         <p:nvSpPr>
-          <p:cNvPr id="7" name="TextBox 6"/>
+          <p:cNvPr id="5" name="TextBox 4"/>
           <p:cNvSpPr txBox="1"/>
           <p:nvPr/>
         </p:nvSpPr>
         <p:spPr>
           <a:xfrm>
-            <a:off x="1097280" y="4389120"/>
-            <a:ext cx="9144000" cy="1371600"/>
+            <a:off x="1005840" y="1417320"/>
+            <a:ext cx="5486400" cy="457200"/>
           </a:xfrm>
           <a:prstGeom prst="rect">
             <a:avLst/>
@@ -3320,35 +3250,41 @@
           <a:noFill/>
         </p:spPr>
         <p:txBody>
-          <a:bodyPr wrap="square">
+          <a:bodyPr wrap="square" anchor="t">
             <a:spAutoFit/>
           </a:bodyPr>
           <a:lstStyle/>
           <a:p>
             <a:pPr algn="l">
-              <a:defRPr sz="1600" b="0">
-                <a:solidFill>
-                  <a:srgbClr val="BBBBBB"/>
-                </a:solidFill>
-                <a:latin typeface="Calibri"/>
-              </a:defRPr>
+              <a:lnSpc>
+                <a:spcPct val="115000"/>
+              </a:lnSpc>
+              <a:spcAft>
+                <a:spcPts val="600"/>
+              </a:spcAft>
             </a:pPr>
             <a:r>
-              <a:t>Application complète de gestion Scrum : Product Backlog, Sprint Planning, suivi Kanban,</a:t>
-            </a:r>
-          </a:p>
-        </p:txBody>
-      </p:sp>
-      <p:sp>
-        <p:nvSpPr>
-          <p:cNvPr id="8" name="TextBox 7"/>
+              <a:rPr sz="1500" b="1">
+                <a:solidFill>
+                  <a:srgbClr val="475569"/>
+                </a:solidFill>
+                <a:latin typeface="Trebuchet MS"/>
+              </a:rPr>
+              <a:t>PRESENTATION EXECUTIVE</a:t>
+            </a:r>
+          </a:p>
+        </p:txBody>
+      </p:sp>
+      <p:sp>
+        <p:nvSpPr>
+          <p:cNvPr id="6" name="TextBox 5"/>
           <p:cNvSpPr txBox="1"/>
           <p:nvPr/>
         </p:nvSpPr>
         <p:spPr>
           <a:xfrm>
-            <a:off x="1097280" y="4754880"/>
-            <a:ext cx="9144000" cy="914400"/>
+            <a:off x="1005840" y="2377440"/>
+            <a:ext cx="10149840" cy="1828800"/>
           </a:xfrm>
           <a:prstGeom prst="rect">
             <a:avLst/>
@@ -3356,35 +3292,42 @@
           <a:noFill/>
         </p:spPr>
         <p:txBody>
-          <a:bodyPr wrap="square">
+          <a:bodyPr wrap="square" anchor="t">
             <a:spAutoFit/>
           </a:bodyPr>
           <a:lstStyle/>
           <a:p>
             <a:pPr algn="l">
-              <a:defRPr sz="1600" b="0">
-                <a:solidFill>
-                  <a:srgbClr val="BBBBBB"/>
-                </a:solidFill>
-                <a:latin typeface="Calibri"/>
-              </a:defRPr>
+              <a:lnSpc>
+                <a:spcPct val="110000"/>
+              </a:lnSpc>
+              <a:spcAft>
+                <a:spcPts val="600"/>
+              </a:spcAft>
             </a:pPr>
             <a:r>
-              <a:t>Daily Scrums répétés, compteurs dynamiques, Rétrospective &amp; Review, rôles multi-équipes</a:t>
-            </a:r>
-          </a:p>
-        </p:txBody>
-      </p:sp>
-      <p:sp>
-        <p:nvSpPr>
-          <p:cNvPr id="9" name="TextBox 8"/>
+              <a:rPr sz="4600" b="1">
+                <a:solidFill>
+                  <a:srgbClr val="0F172A"/>
+                </a:solidFill>
+                <a:latin typeface="Trebuchet MS"/>
+              </a:rPr>
+              <a:t>ScrumFirst : L'Agilité à l'Échelle
+pour les Projets Data &amp; IA</a:t>
+            </a:r>
+          </a:p>
+        </p:txBody>
+      </p:sp>
+      <p:sp>
+        <p:nvSpPr>
+          <p:cNvPr id="7" name="TextBox 6"/>
           <p:cNvSpPr txBox="1"/>
           <p:nvPr/>
         </p:nvSpPr>
         <p:spPr>
           <a:xfrm>
-            <a:off x="1097280" y="5943600"/>
-            <a:ext cx="4572000" cy="457200"/>
+            <a:off x="1005840" y="4343400"/>
+            <a:ext cx="9601200" cy="914400"/>
           </a:xfrm>
           <a:prstGeom prst="rect">
             <a:avLst/>
@@ -3392,21 +3335,114 @@
           <a:noFill/>
         </p:spPr>
         <p:txBody>
-          <a:bodyPr wrap="square">
+          <a:bodyPr wrap="square" anchor="t">
             <a:spAutoFit/>
           </a:bodyPr>
           <a:lstStyle/>
           <a:p>
             <a:pPr algn="l">
-              <a:defRPr sz="1400" b="1">
-                <a:solidFill>
-                  <a:srgbClr val="88AACC"/>
+              <a:lnSpc>
+                <a:spcPct val="130000"/>
+              </a:lnSpc>
+              <a:spcAft>
+                <a:spcPts val="600"/>
+              </a:spcAft>
+            </a:pPr>
+            <a:r>
+              <a:rPr sz="2000" b="0">
+                <a:solidFill>
+                  <a:srgbClr val="1E293B"/>
                 </a:solidFill>
                 <a:latin typeface="Calibri"/>
-              </a:defRPr>
+              </a:rPr>
+              <a:t>Piloter la valeur continue, automatiser la gouvernance
+et structurer le DataOps.</a:t>
+            </a:r>
+          </a:p>
+        </p:txBody>
+      </p:sp>
+      <p:sp>
+        <p:nvSpPr>
+          <p:cNvPr id="8" name="Rectangle 7"/>
+          <p:cNvSpPr/>
+          <p:nvPr/>
+        </p:nvSpPr>
+        <p:spPr>
+          <a:xfrm>
+            <a:off x="1005840" y="5806440"/>
+            <a:ext cx="3108960" cy="19000"/>
+          </a:xfrm>
+          <a:prstGeom prst="rect">
+            <a:avLst/>
+          </a:prstGeom>
+          <a:solidFill>
+            <a:srgbClr val="0F172A"/>
+          </a:solidFill>
+          <a:ln>
+            <a:noFill/>
+          </a:ln>
+          <a:effectLst/>
+        </p:spPr>
+        <p:style>
+          <a:lnRef idx="1">
+            <a:schemeClr val="accent1"/>
+          </a:lnRef>
+          <a:fillRef idx="3">
+            <a:schemeClr val="accent1"/>
+          </a:fillRef>
+          <a:effectRef idx="2">
+            <a:schemeClr val="accent1"/>
+          </a:effectRef>
+          <a:fontRef idx="minor">
+            <a:schemeClr val="lt1"/>
+          </a:fontRef>
+        </p:style>
+        <p:txBody>
+          <a:bodyPr rtlCol="0" anchor="ctr"/>
+          <a:lstStyle/>
+          <a:p>
+            <a:pPr algn="ctr"/>
+          </a:p>
+        </p:txBody>
+      </p:sp>
+      <p:sp>
+        <p:nvSpPr>
+          <p:cNvPr id="9" name="TextBox 8"/>
+          <p:cNvSpPr txBox="1"/>
+          <p:nvPr/>
+        </p:nvSpPr>
+        <p:spPr>
+          <a:xfrm>
+            <a:off x="1005840" y="5943600"/>
+            <a:ext cx="10058400" cy="457200"/>
+          </a:xfrm>
+          <a:prstGeom prst="rect">
+            <a:avLst/>
+          </a:prstGeom>
+          <a:noFill/>
+        </p:spPr>
+        <p:txBody>
+          <a:bodyPr wrap="square" anchor="t">
+            <a:spAutoFit/>
+          </a:bodyPr>
+          <a:lstStyle/>
+          <a:p>
+            <a:pPr algn="l">
+              <a:lnSpc>
+                <a:spcPct val="115000"/>
+              </a:lnSpc>
+              <a:spcAft>
+                <a:spcPts val="600"/>
+              </a:spcAft>
             </a:pPr>
             <a:r>
-              <a:t>Présentation pour Direction Data &amp; IA</a:t>
+              <a:rPr sz="1400" b="1">
+                <a:solidFill>
+                  <a:srgbClr val="475569"/>
+                </a:solidFill>
+                <a:latin typeface="Calibri"/>
+              </a:rPr>
+              <a:t>Présentation Exécutive - Direction Data &amp; Intelligence Artificielle.</a:t>
             </a:r>
           </a:p>
         </p:txBody>
@@ -3425,7 +3461,7 @@
     <p:bg>
       <p:bgPr>
         <a:solidFill>
-          <a:srgbClr val="FFFFFF"/>
+          <a:srgbClr val="F7F6F0"/>
         </a:solidFill>
         <a:effectLst/>
       </p:bgPr>
@@ -3446,17 +3482,18 @@
         <p:spPr>
           <a:xfrm>
             <a:off x="0" y="0"/>
-            <a:ext cx="12191695" cy="101600"/>
+            <a:ext cx="164592" cy="6858000"/>
           </a:xfrm>
           <a:prstGeom prst="rect">
             <a:avLst/>
           </a:prstGeom>
           <a:solidFill>
-            <a:srgbClr val="2C6FEA"/>
+            <a:srgbClr val="0F172A"/>
           </a:solidFill>
           <a:ln>
             <a:noFill/>
           </a:ln>
+          <a:effectLst/>
         </p:spPr>
         <p:style>
           <a:lnRef idx="1">
@@ -3488,8 +3525,8 @@
         </p:nvSpPr>
         <p:spPr>
           <a:xfrm>
-            <a:off x="731520" y="365760"/>
-            <a:ext cx="10058400" cy="640080"/>
+            <a:off x="640080" y="411480"/>
+            <a:ext cx="1463040" cy="365760"/>
           </a:xfrm>
           <a:prstGeom prst="rect">
             <a:avLst/>
@@ -3497,45 +3534,136 @@
           <a:noFill/>
         </p:spPr>
         <p:txBody>
-          <a:bodyPr wrap="square">
+          <a:bodyPr wrap="square" anchor="t">
             <a:spAutoFit/>
           </a:bodyPr>
           <a:lstStyle/>
           <a:p>
             <a:pPr algn="l">
-              <a:defRPr sz="3000" b="1">
-                <a:solidFill>
-                  <a:srgbClr val="2C3E50"/>
+              <a:lnSpc>
+                <a:spcPct val="115000"/>
+              </a:lnSpc>
+              <a:spcAft>
+                <a:spcPts val="600"/>
+              </a:spcAft>
+            </a:pPr>
+            <a:r>
+              <a:rPr sz="1300" b="1">
+                <a:solidFill>
+                  <a:srgbClr val="475569"/>
+                </a:solidFill>
+                <a:latin typeface="Trebuchet MS"/>
+              </a:rPr>
+              <a:t>02</a:t>
+            </a:r>
+          </a:p>
+        </p:txBody>
+      </p:sp>
+      <p:sp>
+        <p:nvSpPr>
+          <p:cNvPr id="4" name="TextBox 3"/>
+          <p:cNvSpPr txBox="1"/>
+          <p:nvPr/>
+        </p:nvSpPr>
+        <p:spPr>
+          <a:xfrm>
+            <a:off x="640080" y="777240"/>
+            <a:ext cx="10881360" cy="914400"/>
+          </a:xfrm>
+          <a:prstGeom prst="rect">
+            <a:avLst/>
+          </a:prstGeom>
+          <a:noFill/>
+        </p:spPr>
+        <p:txBody>
+          <a:bodyPr wrap="square" anchor="t">
+            <a:spAutoFit/>
+          </a:bodyPr>
+          <a:lstStyle/>
+          <a:p>
+            <a:pPr algn="l">
+              <a:lnSpc>
+                <a:spcPct val="115000"/>
+              </a:lnSpc>
+              <a:spcAft>
+                <a:spcPts val="600"/>
+              </a:spcAft>
+            </a:pPr>
+            <a:r>
+              <a:rPr sz="3200" b="1">
+                <a:solidFill>
+                  <a:srgbClr val="0F172A"/>
+                </a:solidFill>
+                <a:latin typeface="Trebuchet MS"/>
+              </a:rPr>
+              <a:t>Pourquoi ScrumFirst ?</a:t>
+            </a:r>
+          </a:p>
+        </p:txBody>
+      </p:sp>
+      <p:sp>
+        <p:nvSpPr>
+          <p:cNvPr id="5" name="TextBox 4"/>
+          <p:cNvSpPr txBox="1"/>
+          <p:nvPr/>
+        </p:nvSpPr>
+        <p:spPr>
+          <a:xfrm>
+            <a:off x="658368" y="1554480"/>
+            <a:ext cx="10515600" cy="457200"/>
+          </a:xfrm>
+          <a:prstGeom prst="rect">
+            <a:avLst/>
+          </a:prstGeom>
+          <a:noFill/>
+        </p:spPr>
+        <p:txBody>
+          <a:bodyPr wrap="square" anchor="t">
+            <a:spAutoFit/>
+          </a:bodyPr>
+          <a:lstStyle/>
+          <a:p>
+            <a:pPr algn="l">
+              <a:lnSpc>
+                <a:spcPct val="115000"/>
+              </a:lnSpc>
+              <a:spcAft>
+                <a:spcPts val="600"/>
+              </a:spcAft>
+            </a:pPr>
+            <a:r>
+              <a:rPr sz="1500" b="0">
+                <a:solidFill>
+                  <a:srgbClr val="475569"/>
                 </a:solidFill>
                 <a:latin typeface="Calibri"/>
-              </a:defRPr>
-            </a:pPr>
-            <a:r>
-              <a:t>Le Défi : Pourquoi un outil Scrum pour la Data &amp; IA ?</a:t>
-            </a:r>
-          </a:p>
-        </p:txBody>
-      </p:sp>
-      <p:sp>
-        <p:nvSpPr>
-          <p:cNvPr id="4" name="Rectangle 3"/>
+              </a:rPr>
+              <a:t>Répondre aux défis du DataOps</a:t>
+            </a:r>
+          </a:p>
+        </p:txBody>
+      </p:sp>
+      <p:sp>
+        <p:nvSpPr>
+          <p:cNvPr id="6" name="Rectangle 5"/>
           <p:cNvSpPr/>
           <p:nvPr/>
         </p:nvSpPr>
         <p:spPr>
           <a:xfrm>
-            <a:off x="731520" y="1005840"/>
-            <a:ext cx="1828800" cy="50800"/>
+            <a:off x="658368" y="1993392"/>
+            <a:ext cx="2011680" cy="28000"/>
           </a:xfrm>
           <a:prstGeom prst="rect">
             <a:avLst/>
           </a:prstGeom>
           <a:solidFill>
-            <a:srgbClr val="2C6FEA"/>
+            <a:srgbClr val="0F172A"/>
           </a:solidFill>
           <a:ln>
             <a:noFill/>
           </a:ln>
+          <a:effectLst/>
         </p:spPr>
         <p:style>
           <a:lnRef idx="1">
@@ -3561,14 +3689,14 @@
       </p:sp>
       <p:sp>
         <p:nvSpPr>
-          <p:cNvPr id="5" name="TextBox 4"/>
+          <p:cNvPr id="7" name="TextBox 6"/>
           <p:cNvSpPr txBox="1"/>
           <p:nvPr/>
         </p:nvSpPr>
         <p:spPr>
           <a:xfrm>
-            <a:off x="731520" y="1371600"/>
-            <a:ext cx="10515600" cy="4114800"/>
+            <a:off x="658368" y="2423160"/>
+            <a:ext cx="10881360" cy="4114800"/>
           </a:xfrm>
           <a:prstGeom prst="rect">
             <a:avLst/>
@@ -3582,122 +3710,138 @@
           <a:lstStyle/>
           <a:p>
             <a:pPr>
+              <a:lnSpc>
+                <a:spcPct val="125000"/>
+              </a:lnSpc>
               <a:spcAft>
-                <a:spcPts val="600"/>
+                <a:spcPts val="1400"/>
               </a:spcAft>
-              <a:defRPr sz="1700">
-                <a:solidFill>
-                  <a:srgbClr val="4A4A4A"/>
+            </a:pPr>
+            <a:r>
+              <a:rPr sz="1700" b="1">
+                <a:solidFill>
+                  <a:srgbClr val="0F172A"/>
                 </a:solidFill>
                 <a:latin typeface="Calibri"/>
-              </a:defRPr>
+              </a:rPr>
+              <a:t>▪  </a:t>
+            </a:r>
+            <a:r>
+              <a:rPr sz="1700" b="1">
+                <a:solidFill>
+                  <a:srgbClr val="0F172A"/>
+                </a:solidFill>
+                <a:latin typeface="Calibri"/>
+              </a:rPr>
+              <a:t>Aligner la R&amp;D IA et le Métier</a:t>
+            </a:r>
+            <a:r>
+              <a:rPr sz="1700" b="0">
+                <a:solidFill>
+                  <a:srgbClr val="1E293B"/>
+                </a:solidFill>
+                <a:latin typeface="Calibri"/>
+              </a:rPr>
+              <a:t> : Fin des projets boîtes noires grâce à un Product Backlog unique axé sur un score de valeur métier.</a:t>
+            </a:r>
+          </a:p>
+          <a:p>
+            <a:pPr>
+              <a:lnSpc>
+                <a:spcPct val="125000"/>
+              </a:lnSpc>
+              <a:spcAft>
+                <a:spcPts val="1400"/>
+              </a:spcAft>
             </a:pPr>
             <a:r>
-              <a:t> ⚡ Les équipes Data manquent d'une visibilité claire sur l'avancement des projets IA</a:t>
+              <a:rPr sz="1700" b="1">
+                <a:solidFill>
+                  <a:srgbClr val="0F172A"/>
+                </a:solidFill>
+                <a:latin typeface="Calibri"/>
+              </a:rPr>
+              <a:t>▪  </a:t>
+            </a:r>
+            <a:r>
+              <a:rPr sz="1700" b="1">
+                <a:solidFill>
+                  <a:srgbClr val="0F172A"/>
+                </a:solidFill>
+                <a:latin typeface="Calibri"/>
+              </a:rPr>
+              <a:t>Maîtriser la Qualité des Pipelines</a:t>
+            </a:r>
+            <a:r>
+              <a:rPr sz="1700" b="0">
+                <a:solidFill>
+                  <a:srgbClr val="1E293B"/>
+                </a:solidFill>
+                <a:latin typeface="Calibri"/>
+              </a:rPr>
+              <a:t> : Fin de la dette technique via l'automatisation stricte et obligatoire des critères de qualité.</a:t>
             </a:r>
           </a:p>
           <a:p>
             <a:pPr>
+              <a:lnSpc>
+                <a:spcPct val="125000"/>
+              </a:lnSpc>
               <a:spcAft>
-                <a:spcPts val="600"/>
+                <a:spcPts val="1400"/>
               </a:spcAft>
-              <a:defRPr sz="1700">
-                <a:solidFill>
-                  <a:srgbClr val="4A4A4A"/>
+            </a:pPr>
+            <a:r>
+              <a:rPr sz="1700" b="1">
+                <a:solidFill>
+                  <a:srgbClr val="0F172A"/>
                 </a:solidFill>
                 <a:latin typeface="Calibri"/>
-              </a:defRPr>
-            </a:pPr>
-            <a:r>
-              <a:t> 📊 Absence de suivi structuré des épics, features et des Daily Scrums répétés</a:t>
-            </a:r>
-          </a:p>
-          <a:p>
-            <a:pPr>
-              <a:spcAft>
-                <a:spcPts val="600"/>
-              </a:spcAft>
-              <a:defRPr sz="1700">
-                <a:solidFill>
-                  <a:srgbClr val="4A4A4A"/>
+              </a:rPr>
+              <a:t>▪  </a:t>
+            </a:r>
+            <a:r>
+              <a:rPr sz="1700" b="1">
+                <a:solidFill>
+                  <a:srgbClr val="0F172A"/>
                 </a:solidFill>
                 <a:latin typeface="Calibri"/>
-              </a:defRPr>
-            </a:pPr>
-            <a:r>
-              <a:t> 👥 Multiples équipes Data travaillent en parallèle sans coordination harmonisée</a:t>
-            </a:r>
-          </a:p>
-          <a:p>
-            <a:pPr>
-              <a:spcAft>
-                <a:spcPts val="600"/>
-              </a:spcAft>
-              <a:defRPr sz="1700">
-                <a:solidFill>
-                  <a:srgbClr val="4A4A4A"/>
+              </a:rPr>
+              <a:t>Traçabilité (Data Lineage)</a:t>
+            </a:r>
+            <a:r>
+              <a:rPr sz="1700" b="0">
+                <a:solidFill>
+                  <a:srgbClr val="1E293B"/>
                 </a:solidFill>
                 <a:latin typeface="Calibri"/>
-              </a:defRPr>
-            </a:pPr>
-            <a:r>
-              <a:t> 📅 La répétition quotidienne des Daily Scrums n'est pas parameterisable ni tracée</a:t>
-            </a:r>
-          </a:p>
-          <a:p>
-            <a:pPr>
-              <a:spcAft>
-                <a:spcPts val="600"/>
-              </a:spcAft>
-              <a:defRPr sz="1700">
-                <a:solidFill>
-                  <a:srgbClr val="4A4A4A"/>
-                </a:solidFill>
-                <a:latin typeface="Calibri"/>
-              </a:defRPr>
-            </a:pPr>
-            <a:r>
-              <a:t> 🎯 La Sprint Review est dispersée : pas de synthèse Team ni de retours Stakeholder structurés</a:t>
-            </a:r>
-          </a:p>
-          <a:p>
-            <a:pPr>
-              <a:spcAft>
-                <a:spcPts val="600"/>
-              </a:spcAft>
-              <a:defRPr sz="1700">
-                <a:solidFill>
-                  <a:srgbClr val="4A4A4A"/>
-                </a:solidFill>
-                <a:latin typeface="Calibri"/>
-              </a:defRPr>
-            </a:pPr>
-            <a:r>
-              <a:t> 🔧 Les outils existants (Jira, Trello) ne s'intègrent pas à notre stack Tech (Next.js/Prisma)</a:t>
-            </a:r>
-          </a:p>
-        </p:txBody>
-      </p:sp>
-      <p:sp>
-        <p:nvSpPr>
-          <p:cNvPr id="6" name="Rectangle 5"/>
+              </a:rPr>
+              <a:t> : Historisation complète des cycles de développement, des blocages et des décisions d'équipe.</a:t>
+            </a:r>
+          </a:p>
+        </p:txBody>
+      </p:sp>
+      <p:sp>
+        <p:nvSpPr>
+          <p:cNvPr id="8" name="Rectangle 7"/>
           <p:cNvSpPr/>
           <p:nvPr/>
         </p:nvSpPr>
         <p:spPr>
           <a:xfrm>
-            <a:off x="731520" y="5669280"/>
-            <a:ext cx="2743200" cy="25400"/>
+            <a:off x="0" y="6492240"/>
+            <a:ext cx="12191695" cy="19000"/>
           </a:xfrm>
           <a:prstGeom prst="rect">
             <a:avLst/>
           </a:prstGeom>
           <a:solidFill>
-            <a:srgbClr val="2C6FEA"/>
+            <a:srgbClr val="0F172A"/>
           </a:solidFill>
           <a:ln>
             <a:noFill/>
           </a:ln>
+          <a:effectLst/>
         </p:spPr>
         <p:style>
           <a:lnRef idx="1">
@@ -3723,14 +3867,14 @@
       </p:sp>
       <p:sp>
         <p:nvSpPr>
-          <p:cNvPr id="7" name="TextBox 6"/>
+          <p:cNvPr id="9" name="TextBox 8"/>
           <p:cNvSpPr txBox="1"/>
           <p:nvPr/>
         </p:nvSpPr>
         <p:spPr>
           <a:xfrm>
-            <a:off x="731520" y="5852160"/>
-            <a:ext cx="10058400" cy="731520"/>
+            <a:off x="658368" y="6510528"/>
+            <a:ext cx="8229600" cy="274320"/>
           </a:xfrm>
           <a:prstGeom prst="rect">
             <a:avLst/>
@@ -3738,21 +3882,27 @@
           <a:noFill/>
         </p:spPr>
         <p:txBody>
-          <a:bodyPr wrap="square">
+          <a:bodyPr wrap="square" anchor="t">
             <a:spAutoFit/>
           </a:bodyPr>
           <a:lstStyle/>
           <a:p>
             <a:pPr algn="l">
-              <a:defRPr sz="1500" b="1">
-                <a:solidFill>
-                  <a:srgbClr val="2C6FEA"/>
+              <a:lnSpc>
+                <a:spcPct val="115000"/>
+              </a:lnSpc>
+              <a:spcAft>
+                <a:spcPts val="600"/>
+              </a:spcAft>
+            </a:pPr>
+            <a:r>
+              <a:rPr sz="1000" b="0">
+                <a:solidFill>
+                  <a:srgbClr val="475569"/>
                 </a:solidFill>
                 <a:latin typeface="Calibri"/>
-              </a:defRPr>
-            </a:pPr>
-            <a:r>
-              <a:t>Question clé : Comment passer d'un suivi artisanal à une gouvernance Scrum native et mesurable ?</a:t>
+              </a:rPr>
+              <a:t>ScrumFirst  |  Direction Data &amp; Intelligence Artificielle</a:t>
             </a:r>
           </a:p>
         </p:txBody>
@@ -3771,7 +3921,7 @@
     <p:bg>
       <p:bgPr>
         <a:solidFill>
-          <a:srgbClr val="FFFFFF"/>
+          <a:srgbClr val="F7F6F0"/>
         </a:solidFill>
         <a:effectLst/>
       </p:bgPr>
@@ -3792,17 +3942,18 @@
         <p:spPr>
           <a:xfrm>
             <a:off x="0" y="0"/>
-            <a:ext cx="12191695" cy="101600"/>
+            <a:ext cx="164592" cy="6858000"/>
           </a:xfrm>
           <a:prstGeom prst="rect">
             <a:avLst/>
           </a:prstGeom>
           <a:solidFill>
-            <a:srgbClr val="2C6FEA"/>
+            <a:srgbClr val="0F172A"/>
           </a:solidFill>
           <a:ln>
             <a:noFill/>
           </a:ln>
+          <a:effectLst/>
         </p:spPr>
         <p:style>
           <a:lnRef idx="1">
@@ -3834,8 +3985,8 @@
         </p:nvSpPr>
         <p:spPr>
           <a:xfrm>
-            <a:off x="731520" y="365760"/>
-            <a:ext cx="10058400" cy="640080"/>
+            <a:off x="640080" y="411480"/>
+            <a:ext cx="1463040" cy="365760"/>
           </a:xfrm>
           <a:prstGeom prst="rect">
             <a:avLst/>
@@ -3843,45 +3994,136 @@
           <a:noFill/>
         </p:spPr>
         <p:txBody>
-          <a:bodyPr wrap="square">
+          <a:bodyPr wrap="square" anchor="t">
             <a:spAutoFit/>
           </a:bodyPr>
           <a:lstStyle/>
           <a:p>
             <a:pPr algn="l">
-              <a:defRPr sz="3000" b="1">
-                <a:solidFill>
-                  <a:srgbClr val="2C3E50"/>
+              <a:lnSpc>
+                <a:spcPct val="115000"/>
+              </a:lnSpc>
+              <a:spcAft>
+                <a:spcPts val="600"/>
+              </a:spcAft>
+            </a:pPr>
+            <a:r>
+              <a:rPr sz="1300" b="1">
+                <a:solidFill>
+                  <a:srgbClr val="475569"/>
+                </a:solidFill>
+                <a:latin typeface="Trebuchet MS"/>
+              </a:rPr>
+              <a:t>03</a:t>
+            </a:r>
+          </a:p>
+        </p:txBody>
+      </p:sp>
+      <p:sp>
+        <p:nvSpPr>
+          <p:cNvPr id="4" name="TextBox 3"/>
+          <p:cNvSpPr txBox="1"/>
+          <p:nvPr/>
+        </p:nvSpPr>
+        <p:spPr>
+          <a:xfrm>
+            <a:off x="640080" y="777240"/>
+            <a:ext cx="10881360" cy="914400"/>
+          </a:xfrm>
+          <a:prstGeom prst="rect">
+            <a:avLst/>
+          </a:prstGeom>
+          <a:noFill/>
+        </p:spPr>
+        <p:txBody>
+          <a:bodyPr wrap="square" anchor="t">
+            <a:spAutoFit/>
+          </a:bodyPr>
+          <a:lstStyle/>
+          <a:p>
+            <a:pPr algn="l">
+              <a:lnSpc>
+                <a:spcPct val="115000"/>
+              </a:lnSpc>
+              <a:spcAft>
+                <a:spcPts val="600"/>
+              </a:spcAft>
+            </a:pPr>
+            <a:r>
+              <a:rPr sz="3200" b="1">
+                <a:solidFill>
+                  <a:srgbClr val="0F172A"/>
+                </a:solidFill>
+                <a:latin typeface="Trebuchet MS"/>
+              </a:rPr>
+              <a:t>Sécurisation des Livrables</a:t>
+            </a:r>
+          </a:p>
+        </p:txBody>
+      </p:sp>
+      <p:sp>
+        <p:nvSpPr>
+          <p:cNvPr id="5" name="TextBox 4"/>
+          <p:cNvSpPr txBox="1"/>
+          <p:nvPr/>
+        </p:nvSpPr>
+        <p:spPr>
+          <a:xfrm>
+            <a:off x="658368" y="1554480"/>
+            <a:ext cx="10515600" cy="457200"/>
+          </a:xfrm>
+          <a:prstGeom prst="rect">
+            <a:avLst/>
+          </a:prstGeom>
+          <a:noFill/>
+        </p:spPr>
+        <p:txBody>
+          <a:bodyPr wrap="square" anchor="t">
+            <a:spAutoFit/>
+          </a:bodyPr>
+          <a:lstStyle/>
+          <a:p>
+            <a:pPr algn="l">
+              <a:lnSpc>
+                <a:spcPct val="115000"/>
+              </a:lnSpc>
+              <a:spcAft>
+                <a:spcPts val="600"/>
+              </a:spcAft>
+            </a:pPr>
+            <a:r>
+              <a:rPr sz="1500" b="0">
+                <a:solidFill>
+                  <a:srgbClr val="475569"/>
                 </a:solidFill>
                 <a:latin typeface="Calibri"/>
-              </a:defRPr>
-            </a:pPr>
-            <a:r>
-              <a:t>La Solution : ScrumFirst — Une réponse native à nos défis</a:t>
-            </a:r>
-          </a:p>
-        </p:txBody>
-      </p:sp>
-      <p:sp>
-        <p:nvSpPr>
-          <p:cNvPr id="4" name="Rectangle 3"/>
+              </a:rPr>
+              <a:t>La Révolution de la Qualité : la Definition of Done (DoD) — Gouvernance automatisée</a:t>
+            </a:r>
+          </a:p>
+        </p:txBody>
+      </p:sp>
+      <p:sp>
+        <p:nvSpPr>
+          <p:cNvPr id="6" name="Rectangle 5"/>
           <p:cNvSpPr/>
           <p:nvPr/>
         </p:nvSpPr>
         <p:spPr>
           <a:xfrm>
-            <a:off x="731520" y="1005840"/>
-            <a:ext cx="1828800" cy="50800"/>
+            <a:off x="658368" y="1993392"/>
+            <a:ext cx="2011680" cy="28000"/>
           </a:xfrm>
           <a:prstGeom prst="rect">
             <a:avLst/>
           </a:prstGeom>
           <a:solidFill>
-            <a:srgbClr val="2C6FEA"/>
+            <a:srgbClr val="0F172A"/>
           </a:solidFill>
           <a:ln>
             <a:noFill/>
           </a:ln>
+          <a:effectLst/>
         </p:spPr>
         <p:style>
           <a:lnRef idx="1">
@@ -3907,24 +4149,159 @@
       </p:sp>
       <p:sp>
         <p:nvSpPr>
-          <p:cNvPr id="5" name="Rounded Rectangle 4"/>
+          <p:cNvPr id="7" name="TextBox 6"/>
+          <p:cNvSpPr txBox="1"/>
+          <p:nvPr/>
+        </p:nvSpPr>
+        <p:spPr>
+          <a:xfrm>
+            <a:off x="658368" y="2423160"/>
+            <a:ext cx="10881360" cy="4114800"/>
+          </a:xfrm>
+          <a:prstGeom prst="rect">
+            <a:avLst/>
+          </a:prstGeom>
+          <a:noFill/>
+        </p:spPr>
+        <p:txBody>
+          <a:bodyPr wrap="square">
+            <a:spAutoFit/>
+          </a:bodyPr>
+          <a:lstStyle/>
+          <a:p>
+            <a:pPr>
+              <a:lnSpc>
+                <a:spcPct val="125000"/>
+              </a:lnSpc>
+              <a:spcAft>
+                <a:spcPts val="1400"/>
+              </a:spcAft>
+            </a:pPr>
+            <a:r>
+              <a:rPr sz="1700" b="1">
+                <a:solidFill>
+                  <a:srgbClr val="0F172A"/>
+                </a:solidFill>
+                <a:latin typeface="Calibri"/>
+              </a:rPr>
+              <a:t>▪  </a:t>
+            </a:r>
+            <a:r>
+              <a:rPr sz="1700" b="1">
+                <a:solidFill>
+                  <a:srgbClr val="0F172A"/>
+                </a:solidFill>
+                <a:latin typeface="Calibri"/>
+              </a:rPr>
+              <a:t>La Grille DoD Globale</a:t>
+            </a:r>
+            <a:r>
+              <a:rPr sz="1700" b="0">
+                <a:solidFill>
+                  <a:srgbClr val="1E293B"/>
+                </a:solidFill>
+                <a:latin typeface="Calibri"/>
+              </a:rPr>
+              <a:t> : Critères de qualité non négociables (tests unitaires passants, versioning de modèle validé, non-régression).</a:t>
+            </a:r>
+          </a:p>
+          <a:p>
+            <a:pPr>
+              <a:lnSpc>
+                <a:spcPct val="125000"/>
+              </a:lnSpc>
+              <a:spcAft>
+                <a:spcPts val="1400"/>
+              </a:spcAft>
+            </a:pPr>
+            <a:r>
+              <a:rPr sz="1700" b="1">
+                <a:solidFill>
+                  <a:srgbClr val="0F172A"/>
+                </a:solidFill>
+                <a:latin typeface="Calibri"/>
+              </a:rPr>
+              <a:t>▪  </a:t>
+            </a:r>
+            <a:r>
+              <a:rPr sz="1700" b="1">
+                <a:solidFill>
+                  <a:srgbClr val="0F172A"/>
+                </a:solidFill>
+                <a:latin typeface="Calibri"/>
+              </a:rPr>
+              <a:t>Blocage strict à la source</a:t>
+            </a:r>
+            <a:r>
+              <a:rPr sz="1700" b="0">
+                <a:solidFill>
+                  <a:srgbClr val="1E293B"/>
+                </a:solidFill>
+                <a:latin typeface="Calibri"/>
+              </a:rPr>
+              <a:t> : Impossible de passer un item à « DONE » ou de le promouvoir en Incrément si la DoD est &lt; 100 %.</a:t>
+            </a:r>
+          </a:p>
+          <a:p>
+            <a:pPr>
+              <a:lnSpc>
+                <a:spcPct val="125000"/>
+              </a:lnSpc>
+              <a:spcAft>
+                <a:spcPts val="1400"/>
+              </a:spcAft>
+            </a:pPr>
+            <a:r>
+              <a:rPr sz="1700" b="1">
+                <a:solidFill>
+                  <a:srgbClr val="0F172A"/>
+                </a:solidFill>
+                <a:latin typeface="Calibri"/>
+              </a:rPr>
+              <a:t>▪  </a:t>
+            </a:r>
+            <a:r>
+              <a:rPr sz="1700" b="1">
+                <a:solidFill>
+                  <a:srgbClr val="0F172A"/>
+                </a:solidFill>
+                <a:latin typeface="Calibri"/>
+              </a:rPr>
+              <a:t>Droit à l'erreur intégré</a:t>
+            </a:r>
+            <a:r>
+              <a:rPr sz="1700" b="0">
+                <a:solidFill>
+                  <a:srgbClr val="1E293B"/>
+                </a:solidFill>
+                <a:latin typeface="Calibri"/>
+              </a:rPr>
+              <a:t> : Rejet d'un item de « DONE » vers le Backlog avec purge automatique des critères en cas d'anomalie en production.</a:t>
+            </a:r>
+          </a:p>
+        </p:txBody>
+      </p:sp>
+      <p:sp>
+        <p:nvSpPr>
+          <p:cNvPr id="8" name="Rectangle 7"/>
           <p:cNvSpPr/>
           <p:nvPr/>
         </p:nvSpPr>
         <p:spPr>
           <a:xfrm>
-            <a:off x="731520" y="1371600"/>
-            <a:ext cx="3474720" cy="2286000"/>
-          </a:xfrm>
-          <a:prstGeom prst="roundRect">
+            <a:off x="0" y="6492240"/>
+            <a:ext cx="12191695" cy="19000"/>
+          </a:xfrm>
+          <a:prstGeom prst="rect">
             <a:avLst/>
           </a:prstGeom>
           <a:solidFill>
-            <a:srgbClr val="F5E6D6"/>
+            <a:srgbClr val="0F172A"/>
           </a:solidFill>
           <a:ln>
             <a:noFill/>
           </a:ln>
+          <a:effectLst/>
         </p:spPr>
         <p:style>
           <a:lnRef idx="1">
@@ -3950,14 +4327,14 @@
       </p:sp>
       <p:sp>
         <p:nvSpPr>
-          <p:cNvPr id="6" name="TextBox 5"/>
+          <p:cNvPr id="9" name="TextBox 8"/>
           <p:cNvSpPr txBox="1"/>
           <p:nvPr/>
         </p:nvSpPr>
         <p:spPr>
           <a:xfrm>
-            <a:off x="914400" y="1463040"/>
-            <a:ext cx="3108960" cy="457200"/>
+            <a:off x="658368" y="6510528"/>
+            <a:ext cx="8229600" cy="274320"/>
           </a:xfrm>
           <a:prstGeom prst="rect">
             <a:avLst/>
@@ -3965,81 +4342,78 @@
           <a:noFill/>
         </p:spPr>
         <p:txBody>
-          <a:bodyPr wrap="square">
+          <a:bodyPr wrap="square" anchor="t">
             <a:spAutoFit/>
           </a:bodyPr>
           <a:lstStyle/>
           <a:p>
-            <a:pPr algn="ctr">
-              <a:defRPr sz="1400" b="1">
-                <a:solidFill>
-                  <a:srgbClr val="2C3E50"/>
+            <a:pPr algn="l">
+              <a:lnSpc>
+                <a:spcPct val="115000"/>
+              </a:lnSpc>
+              <a:spcAft>
+                <a:spcPts val="600"/>
+              </a:spcAft>
+            </a:pPr>
+            <a:r>
+              <a:rPr sz="1000" b="0">
+                <a:solidFill>
+                  <a:srgbClr val="475569"/>
                 </a:solidFill>
                 <a:latin typeface="Calibri"/>
-              </a:defRPr>
-            </a:pPr>
-            <a:r>
-              <a:t>GESTION DE PROJET</a:t>
-            </a:r>
-          </a:p>
-        </p:txBody>
-      </p:sp>
-      <p:sp>
-        <p:nvSpPr>
-          <p:cNvPr id="7" name="TextBox 6"/>
-          <p:cNvSpPr txBox="1"/>
+              </a:rPr>
+              <a:t>ScrumFirst  |  Direction Data &amp; Intelligence Artificielle</a:t>
+            </a:r>
+          </a:p>
+        </p:txBody>
+      </p:sp>
+    </p:spTree>
+  </p:cSld>
+  <p:clrMapOvr>
+    <a:masterClrMapping/>
+  </p:clrMapOvr>
+</p:sld>
+</file>
+
+<file path=ppt/slides/slide4.xml><?xml version="1.0" encoding="utf-8"?>
+<p:sld xmlns:a="http://schemas.openxmlformats.org/drawingml/2006/main" xmlns:p="http://schemas.openxmlformats.org/presentationml/2006/main" xmlns:r="http://schemas.openxmlformats.org/officeDocument/2006/relationships">
+  <p:cSld>
+    <p:bg>
+      <p:bgPr>
+        <a:solidFill>
+          <a:srgbClr val="F7F6F0"/>
+        </a:solidFill>
+        <a:effectLst/>
+      </p:bgPr>
+    </p:bg>
+    <p:spTree>
+      <p:nvGrpSpPr>
+        <p:cNvPr id="1" name=""/>
+        <p:cNvGrpSpPr/>
+        <p:nvPr/>
+      </p:nvGrpSpPr>
+      <p:grpSpPr/>
+      <p:sp>
+        <p:nvSpPr>
+          <p:cNvPr id="2" name="Rectangle 1"/>
+          <p:cNvSpPr/>
           <p:nvPr/>
         </p:nvSpPr>
         <p:spPr>
           <a:xfrm>
-            <a:off x="914400" y="1920240"/>
-            <a:ext cx="3108960" cy="1371600"/>
+            <a:off x="0" y="0"/>
+            <a:ext cx="164592" cy="6858000"/>
           </a:xfrm>
           <a:prstGeom prst="rect">
             <a:avLst/>
           </a:prstGeom>
-          <a:noFill/>
-        </p:spPr>
-        <p:txBody>
-          <a:bodyPr wrap="square">
-            <a:spAutoFit/>
-          </a:bodyPr>
-          <a:lstStyle/>
-          <a:p>
-            <a:pPr algn="ctr">
-              <a:defRPr sz="1200" b="0">
-                <a:solidFill>
-                  <a:srgbClr val="4A4A4A"/>
-                </a:solidFill>
-                <a:latin typeface="Calibri"/>
-              </a:defRPr>
-            </a:pPr>
-            <a:r>
-              <a:t>· Product Backlog · Sprint Planning · Kanban séquentiel · DoD unique par produit</a:t>
-            </a:r>
-          </a:p>
-        </p:txBody>
-      </p:sp>
-      <p:sp>
-        <p:nvSpPr>
-          <p:cNvPr id="8" name="Rounded Rectangle 7"/>
-          <p:cNvSpPr/>
-          <p:nvPr/>
-        </p:nvSpPr>
-        <p:spPr>
-          <a:xfrm>
-            <a:off x="4572000" y="1371600"/>
-            <a:ext cx="3474720" cy="2286000"/>
-          </a:xfrm>
-          <a:prstGeom prst="roundRect">
-            <a:avLst/>
-          </a:prstGeom>
           <a:solidFill>
-            <a:srgbClr val="F5E6D6"/>
+            <a:srgbClr val="0F172A"/>
           </a:solidFill>
           <a:ln>
             <a:noFill/>
           </a:ln>
+          <a:effectLst/>
         </p:spPr>
         <p:style>
           <a:lnRef idx="1">
@@ -4065,14 +4439,14 @@
       </p:sp>
       <p:sp>
         <p:nvSpPr>
-          <p:cNvPr id="9" name="TextBox 8"/>
+          <p:cNvPr id="3" name="TextBox 2"/>
           <p:cNvSpPr txBox="1"/>
           <p:nvPr/>
         </p:nvSpPr>
         <p:spPr>
           <a:xfrm>
-            <a:off x="4754880" y="1463040"/>
-            <a:ext cx="3108960" cy="457200"/>
+            <a:off x="640080" y="411480"/>
+            <a:ext cx="1463040" cy="365760"/>
           </a:xfrm>
           <a:prstGeom prst="rect">
             <a:avLst/>
@@ -4080,35 +4454,41 @@
           <a:noFill/>
         </p:spPr>
         <p:txBody>
-          <a:bodyPr wrap="square">
+          <a:bodyPr wrap="square" anchor="t">
             <a:spAutoFit/>
           </a:bodyPr>
           <a:lstStyle/>
           <a:p>
-            <a:pPr algn="ctr">
-              <a:defRPr sz="1400" b="1">
-                <a:solidFill>
-                  <a:srgbClr val="2C3E50"/>
-                </a:solidFill>
-                <a:latin typeface="Calibri"/>
-              </a:defRPr>
+            <a:pPr algn="l">
+              <a:lnSpc>
+                <a:spcPct val="115000"/>
+              </a:lnSpc>
+              <a:spcAft>
+                <a:spcPts val="600"/>
+              </a:spcAft>
             </a:pPr>
             <a:r>
-              <a:t>DAILY &amp; SPRINT</a:t>
-            </a:r>
-          </a:p>
-        </p:txBody>
-      </p:sp>
-      <p:sp>
-        <p:nvSpPr>
-          <p:cNvPr id="10" name="TextBox 9"/>
+              <a:rPr sz="1300" b="1">
+                <a:solidFill>
+                  <a:srgbClr val="475569"/>
+                </a:solidFill>
+                <a:latin typeface="Trebuchet MS"/>
+              </a:rPr>
+              <a:t>04</a:t>
+            </a:r>
+          </a:p>
+        </p:txBody>
+      </p:sp>
+      <p:sp>
+        <p:nvSpPr>
+          <p:cNvPr id="4" name="TextBox 3"/>
           <p:cNvSpPr txBox="1"/>
           <p:nvPr/>
         </p:nvSpPr>
         <p:spPr>
           <a:xfrm>
-            <a:off x="4754880" y="1920240"/>
-            <a:ext cx="3108960" cy="1371600"/>
+            <a:off x="640080" y="777240"/>
+            <a:ext cx="10881360" cy="914400"/>
           </a:xfrm>
           <a:prstGeom prst="rect">
             <a:avLst/>
@@ -4116,45 +4496,94 @@
           <a:noFill/>
         </p:spPr>
         <p:txBody>
-          <a:bodyPr wrap="square">
+          <a:bodyPr wrap="square" anchor="t">
             <a:spAutoFit/>
           </a:bodyPr>
           <a:lstStyle/>
           <a:p>
-            <a:pPr algn="ctr">
-              <a:defRPr sz="1200" b="0">
-                <a:solidFill>
-                  <a:srgbClr val="4A4A4A"/>
+            <a:pPr algn="l">
+              <a:lnSpc>
+                <a:spcPct val="115000"/>
+              </a:lnSpc>
+              <a:spcAft>
+                <a:spcPts val="600"/>
+              </a:spcAft>
+            </a:pPr>
+            <a:r>
+              <a:rPr sz="3200" b="1">
+                <a:solidFill>
+                  <a:srgbClr val="0F172A"/>
+                </a:solidFill>
+                <a:latin typeface="Trebuchet MS"/>
+              </a:rPr>
+              <a:t>Une Architecture Conçue pour le Passage à l'Échelle</a:t>
+            </a:r>
+          </a:p>
+        </p:txBody>
+      </p:sp>
+      <p:sp>
+        <p:nvSpPr>
+          <p:cNvPr id="5" name="TextBox 4"/>
+          <p:cNvSpPr txBox="1"/>
+          <p:nvPr/>
+        </p:nvSpPr>
+        <p:spPr>
+          <a:xfrm>
+            <a:off x="658368" y="1554480"/>
+            <a:ext cx="10515600" cy="457200"/>
+          </a:xfrm>
+          <a:prstGeom prst="rect">
+            <a:avLst/>
+          </a:prstGeom>
+          <a:noFill/>
+        </p:spPr>
+        <p:txBody>
+          <a:bodyPr wrap="square" anchor="t">
+            <a:spAutoFit/>
+          </a:bodyPr>
+          <a:lstStyle/>
+          <a:p>
+            <a:pPr algn="l">
+              <a:lnSpc>
+                <a:spcPct val="115000"/>
+              </a:lnSpc>
+              <a:spcAft>
+                <a:spcPts val="600"/>
+              </a:spcAft>
+            </a:pPr>
+            <a:r>
+              <a:rPr sz="1500" b="0">
+                <a:solidFill>
+                  <a:srgbClr val="475569"/>
                 </a:solidFill>
                 <a:latin typeface="Calibri"/>
-              </a:defRPr>
-            </a:pPr>
-            <a:r>
-              <a:t>· Daily Scrums répétés · Compteur X / TOTAL modifiable · Clôture définitive · Chronos time-box</a:t>
-            </a:r>
-          </a:p>
-        </p:txBody>
-      </p:sp>
-      <p:sp>
-        <p:nvSpPr>
-          <p:cNvPr id="11" name="Rounded Rectangle 10"/>
+              </a:rPr>
+              <a:t>Flexibilité Organisationnelle : le Multi-Équipes Parallèle</a:t>
+            </a:r>
+          </a:p>
+        </p:txBody>
+      </p:sp>
+      <p:sp>
+        <p:nvSpPr>
+          <p:cNvPr id="6" name="Rectangle 5"/>
           <p:cNvSpPr/>
           <p:nvPr/>
         </p:nvSpPr>
         <p:spPr>
           <a:xfrm>
-            <a:off x="8412480" y="1371600"/>
-            <a:ext cx="3474720" cy="2286000"/>
-          </a:xfrm>
-          <a:prstGeom prst="roundRect">
+            <a:off x="658368" y="1993392"/>
+            <a:ext cx="2011680" cy="28000"/>
+          </a:xfrm>
+          <a:prstGeom prst="rect">
             <a:avLst/>
           </a:prstGeom>
           <a:solidFill>
-            <a:srgbClr val="F5E6D6"/>
+            <a:srgbClr val="0F172A"/>
           </a:solidFill>
           <a:ln>
             <a:noFill/>
           </a:ln>
+          <a:effectLst/>
         </p:spPr>
         <p:style>
           <a:lnRef idx="1">
@@ -4180,14 +4609,14 @@
       </p:sp>
       <p:sp>
         <p:nvSpPr>
-          <p:cNvPr id="12" name="TextBox 11"/>
+          <p:cNvPr id="7" name="TextBox 6"/>
           <p:cNvSpPr txBox="1"/>
           <p:nvPr/>
         </p:nvSpPr>
         <p:spPr>
           <a:xfrm>
-            <a:off x="8595360" y="1463040"/>
-            <a:ext cx="3108960" cy="457200"/>
+            <a:off x="658368" y="2423160"/>
+            <a:ext cx="10881360" cy="4114800"/>
           </a:xfrm>
           <a:prstGeom prst="rect">
             <a:avLst/>
@@ -4200,76 +4629,139 @@
           </a:bodyPr>
           <a:lstStyle/>
           <a:p>
-            <a:pPr algn="ctr">
-              <a:defRPr sz="1400" b="1">
-                <a:solidFill>
-                  <a:srgbClr val="2C3E50"/>
+            <a:pPr>
+              <a:lnSpc>
+                <a:spcPct val="125000"/>
+              </a:lnSpc>
+              <a:spcAft>
+                <a:spcPts val="1400"/>
+              </a:spcAft>
+            </a:pPr>
+            <a:r>
+              <a:rPr sz="1700" b="1">
+                <a:solidFill>
+                  <a:srgbClr val="0F172A"/>
                 </a:solidFill>
                 <a:latin typeface="Calibri"/>
-              </a:defRPr>
+              </a:rPr>
+              <a:t>▪  </a:t>
+            </a:r>
+            <a:r>
+              <a:rPr sz="1700" b="1">
+                <a:solidFill>
+                  <a:srgbClr val="0F172A"/>
+                </a:solidFill>
+                <a:latin typeface="Calibri"/>
+              </a:rPr>
+              <a:t>Source Unique de Vérité</a:t>
+            </a:r>
+            <a:r>
+              <a:rPr sz="1700" b="0">
+                <a:solidFill>
+                  <a:srgbClr val="1E293B"/>
+                </a:solidFill>
+                <a:latin typeface="Calibri"/>
+              </a:rPr>
+              <a:t> : Un seul Product Backlog global pour le produit Data, géré par le Product Owner.</a:t>
+            </a:r>
+          </a:p>
+          <a:p>
+            <a:pPr>
+              <a:lnSpc>
+                <a:spcPct val="125000"/>
+              </a:lnSpc>
+              <a:spcAft>
+                <a:spcPts val="1400"/>
+              </a:spcAft>
             </a:pPr>
             <a:r>
-              <a:t>REVIEW &amp; RÉTROSPECTIVE</a:t>
-            </a:r>
-          </a:p>
-        </p:txBody>
-      </p:sp>
-      <p:sp>
-        <p:nvSpPr>
-          <p:cNvPr id="13" name="TextBox 12"/>
-          <p:cNvSpPr txBox="1"/>
-          <p:nvPr/>
-        </p:nvSpPr>
-        <p:spPr>
-          <a:xfrm>
-            <a:off x="8595360" y="1920240"/>
-            <a:ext cx="3108960" cy="1371600"/>
-          </a:xfrm>
-          <a:prstGeom prst="rect">
-            <a:avLst/>
-          </a:prstGeom>
-          <a:noFill/>
-        </p:spPr>
-        <p:txBody>
-          <a:bodyPr wrap="square">
-            <a:spAutoFit/>
-          </a:bodyPr>
-          <a:lstStyle/>
-          <a:p>
-            <a:pPr algn="ctr">
-              <a:defRPr sz="1200" b="0">
-                <a:solidFill>
-                  <a:srgbClr val="4A4A4A"/>
+              <a:rPr sz="1700" b="1">
+                <a:solidFill>
+                  <a:srgbClr val="0F172A"/>
                 </a:solidFill>
                 <a:latin typeface="Calibri"/>
-              </a:defRPr>
+              </a:rPr>
+              <a:t>▪  </a:t>
+            </a:r>
+            <a:r>
+              <a:rPr sz="1700" b="1">
+                <a:solidFill>
+                  <a:srgbClr val="0F172A"/>
+                </a:solidFill>
+                <a:latin typeface="Calibri"/>
+              </a:rPr>
+              <a:t>Sprints Parallèles et Étanches</a:t>
+            </a:r>
+            <a:r>
+              <a:rPr sz="1700" b="0">
+                <a:solidFill>
+                  <a:srgbClr val="1E293B"/>
+                </a:solidFill>
+                <a:latin typeface="Calibri"/>
+              </a:rPr>
+              <a:t> : Plusieurs équipes (Team Data Engineering, Team Data Science) travaillent sur le même backlog.</a:t>
+            </a:r>
+          </a:p>
+          <a:p>
+            <a:pPr>
+              <a:lnSpc>
+                <a:spcPct val="125000"/>
+              </a:lnSpc>
+              <a:spcAft>
+                <a:spcPts val="1400"/>
+              </a:spcAft>
             </a:pPr>
             <a:r>
-              <a:t>· Sprint Review (2 colonnes · synthèse Team / retours Stakeholder) · Plan d'actions · Idées Post-its</a:t>
-            </a:r>
-          </a:p>
-        </p:txBody>
-      </p:sp>
-      <p:sp>
-        <p:nvSpPr>
-          <p:cNvPr id="14" name="Rectangle 13"/>
+              <a:rPr sz="1700" b="1">
+                <a:solidFill>
+                  <a:srgbClr val="0F172A"/>
+                </a:solidFill>
+                <a:latin typeface="Calibri"/>
+              </a:rPr>
+              <a:t>▪  </a:t>
+            </a:r>
+            <a:r>
+              <a:rPr sz="1700" b="1">
+                <a:solidFill>
+                  <a:srgbClr val="0F172A"/>
+                </a:solidFill>
+                <a:latin typeface="Calibri"/>
+              </a:rPr>
+              <a:t>Verrous de Sécurité Contextuels</a:t>
+            </a:r>
+            <a:r>
+              <a:rPr sz="1700" b="0">
+                <a:solidFill>
+                  <a:srgbClr val="1E293B"/>
+                </a:solidFill>
+                <a:latin typeface="Calibri"/>
+              </a:rPr>
+              <a:t> : Algorithme interdisant à une même équipe d'ouvrir deux sprints actifs, sans bloquer les autres équipes.</a:t>
+            </a:r>
+          </a:p>
+        </p:txBody>
+      </p:sp>
+      <p:sp>
+        <p:nvSpPr>
+          <p:cNvPr id="8" name="Rectangle 7"/>
           <p:cNvSpPr/>
           <p:nvPr/>
         </p:nvSpPr>
         <p:spPr>
           <a:xfrm>
-            <a:off x="731520" y="4114800"/>
-            <a:ext cx="10515600" cy="38100"/>
+            <a:off x="0" y="6492240"/>
+            <a:ext cx="12191695" cy="19000"/>
           </a:xfrm>
           <a:prstGeom prst="rect">
             <a:avLst/>
           </a:prstGeom>
           <a:solidFill>
-            <a:srgbClr val="2C6FEA"/>
+            <a:srgbClr val="0F172A"/>
           </a:solidFill>
           <a:ln>
             <a:noFill/>
           </a:ln>
+          <a:effectLst/>
         </p:spPr>
         <p:style>
           <a:lnRef idx="1">
@@ -4295,14 +4787,14 @@
       </p:sp>
       <p:sp>
         <p:nvSpPr>
-          <p:cNvPr id="15" name="TextBox 14"/>
+          <p:cNvPr id="9" name="TextBox 8"/>
           <p:cNvSpPr txBox="1"/>
           <p:nvPr/>
         </p:nvSpPr>
         <p:spPr>
           <a:xfrm>
-            <a:off x="731520" y="4389120"/>
-            <a:ext cx="10515600" cy="1097280"/>
+            <a:off x="658368" y="6510528"/>
+            <a:ext cx="8229600" cy="274320"/>
           </a:xfrm>
           <a:prstGeom prst="rect">
             <a:avLst/>
@@ -4310,57 +4802,27 @@
           <a:noFill/>
         </p:spPr>
         <p:txBody>
-          <a:bodyPr wrap="square">
+          <a:bodyPr wrap="square" anchor="t">
             <a:spAutoFit/>
           </a:bodyPr>
           <a:lstStyle/>
           <a:p>
             <a:pPr algn="l">
-              <a:defRPr sz="1500" b="1">
-                <a:solidFill>
-                  <a:srgbClr val="2C3E50"/>
+              <a:lnSpc>
+                <a:spcPct val="115000"/>
+              </a:lnSpc>
+              <a:spcAft>
+                <a:spcPts val="600"/>
+              </a:spcAft>
+            </a:pPr>
+            <a:r>
+              <a:rPr sz="1000" b="0">
+                <a:solidFill>
+                  <a:srgbClr val="475569"/>
                 </a:solidFill>
                 <a:latin typeface="Calibri"/>
-              </a:defRPr>
-            </a:pPr>
-            <a:r>
-              <a:t>✅ Une application full-stack Next.js + Prisma + PostgreSQL — aucun outil tiers, zéro licence, hébergement libre ou Vercel</a:t>
-            </a:r>
-          </a:p>
-        </p:txBody>
-      </p:sp>
-      <p:sp>
-        <p:nvSpPr>
-          <p:cNvPr id="16" name="TextBox 15"/>
-          <p:cNvSpPr txBox="1"/>
-          <p:nvPr/>
-        </p:nvSpPr>
-        <p:spPr>
-          <a:xfrm>
-            <a:off x="731520" y="5029200"/>
-            <a:ext cx="10515600" cy="1097280"/>
-          </a:xfrm>
-          <a:prstGeom prst="rect">
-            <a:avLst/>
-          </a:prstGeom>
-          <a:noFill/>
-        </p:spPr>
-        <p:txBody>
-          <a:bodyPr wrap="square">
-            <a:spAutoFit/>
-          </a:bodyPr>
-          <a:lstStyle/>
-          <a:p>
-            <a:pPr algn="l">
-              <a:defRPr sz="1500" b="1">
-                <a:solidFill>
-                  <a:srgbClr val="2C3E50"/>
-                </a:solidFill>
-                <a:latin typeface="Calibri"/>
-              </a:defRPr>
-            </a:pPr>
-            <a:r>
-              <a:t>✅ Conçu pour la Scrum Team : rôles PO/SM/Dev/Stakeholder respectés · Permet sprints parallèles sur un même produit · Migration progressive</a:t>
+              </a:rPr>
+              <a:t>ScrumFirst  |  Direction Data &amp; Intelligence Artificielle</a:t>
             </a:r>
           </a:p>
         </p:txBody>
@@ -4373,13 +4835,13 @@
 </p:sld>
 </file>
 
-<file path=ppt/slides/slide4.xml><?xml version="1.0" encoding="utf-8"?>
+<file path=ppt/slides/slide5.xml><?xml version="1.0" encoding="utf-8"?>
 <p:sld xmlns:a="http://schemas.openxmlformats.org/drawingml/2006/main" xmlns:p="http://schemas.openxmlformats.org/presentationml/2006/main" xmlns:r="http://schemas.openxmlformats.org/officeDocument/2006/relationships">
   <p:cSld>
     <p:bg>
       <p:bgPr>
         <a:solidFill>
-          <a:srgbClr val="FFFFFF"/>
+          <a:srgbClr val="F7F6F0"/>
         </a:solidFill>
         <a:effectLst/>
       </p:bgPr>
@@ -4400,17 +4862,18 @@
         <p:spPr>
           <a:xfrm>
             <a:off x="0" y="0"/>
-            <a:ext cx="12191695" cy="101600"/>
+            <a:ext cx="164592" cy="6858000"/>
           </a:xfrm>
           <a:prstGeom prst="rect">
             <a:avLst/>
           </a:prstGeom>
           <a:solidFill>
-            <a:srgbClr val="2C6FEA"/>
+            <a:srgbClr val="0F172A"/>
           </a:solidFill>
           <a:ln>
             <a:noFill/>
           </a:ln>
+          <a:effectLst/>
         </p:spPr>
         <p:style>
           <a:lnRef idx="1">
@@ -4442,8 +4905,8 @@
         </p:nvSpPr>
         <p:spPr>
           <a:xfrm>
-            <a:off x="731520" y="365760"/>
-            <a:ext cx="10058400" cy="640080"/>
+            <a:off x="640080" y="411480"/>
+            <a:ext cx="1463040" cy="365760"/>
           </a:xfrm>
           <a:prstGeom prst="rect">
             <a:avLst/>
@@ -4451,45 +4914,136 @@
           <a:noFill/>
         </p:spPr>
         <p:txBody>
-          <a:bodyPr wrap="square">
+          <a:bodyPr wrap="square" anchor="t">
             <a:spAutoFit/>
           </a:bodyPr>
           <a:lstStyle/>
           <a:p>
             <a:pPr algn="l">
-              <a:defRPr sz="3000" b="1">
-                <a:solidFill>
-                  <a:srgbClr val="2C3E50"/>
+              <a:lnSpc>
+                <a:spcPct val="115000"/>
+              </a:lnSpc>
+              <a:spcAft>
+                <a:spcPts val="600"/>
+              </a:spcAft>
+            </a:pPr>
+            <a:r>
+              <a:rPr sz="1300" b="1">
+                <a:solidFill>
+                  <a:srgbClr val="475569"/>
+                </a:solidFill>
+                <a:latin typeface="Trebuchet MS"/>
+              </a:rPr>
+              <a:t>05</a:t>
+            </a:r>
+          </a:p>
+        </p:txBody>
+      </p:sp>
+      <p:sp>
+        <p:nvSpPr>
+          <p:cNvPr id="4" name="TextBox 3"/>
+          <p:cNvSpPr txBox="1"/>
+          <p:nvPr/>
+        </p:nvSpPr>
+        <p:spPr>
+          <a:xfrm>
+            <a:off x="640080" y="777240"/>
+            <a:ext cx="10881360" cy="914400"/>
+          </a:xfrm>
+          <a:prstGeom prst="rect">
+            <a:avLst/>
+          </a:prstGeom>
+          <a:noFill/>
+        </p:spPr>
+        <p:txBody>
+          <a:bodyPr wrap="square" anchor="t">
+            <a:spAutoFit/>
+          </a:bodyPr>
+          <a:lstStyle/>
+          <a:p>
+            <a:pPr algn="l">
+              <a:lnSpc>
+                <a:spcPct val="115000"/>
+              </a:lnSpc>
+              <a:spcAft>
+                <a:spcPts val="600"/>
+              </a:spcAft>
+            </a:pPr>
+            <a:r>
+              <a:rPr sz="3200" b="1">
+                <a:solidFill>
+                  <a:srgbClr val="0F172A"/>
+                </a:solidFill>
+                <a:latin typeface="Trebuchet MS"/>
+              </a:rPr>
+              <a:t>Traçabilité Absolue des Rituels Agiles</a:t>
+            </a:r>
+          </a:p>
+        </p:txBody>
+      </p:sp>
+      <p:sp>
+        <p:nvSpPr>
+          <p:cNvPr id="5" name="TextBox 4"/>
+          <p:cNvSpPr txBox="1"/>
+          <p:nvPr/>
+        </p:nvSpPr>
+        <p:spPr>
+          <a:xfrm>
+            <a:off x="658368" y="1554480"/>
+            <a:ext cx="10515600" cy="457200"/>
+          </a:xfrm>
+          <a:prstGeom prst="rect">
+            <a:avLst/>
+          </a:prstGeom>
+          <a:noFill/>
+        </p:spPr>
+        <p:txBody>
+          <a:bodyPr wrap="square" anchor="t">
+            <a:spAutoFit/>
+          </a:bodyPr>
+          <a:lstStyle/>
+          <a:p>
+            <a:pPr algn="l">
+              <a:lnSpc>
+                <a:spcPct val="115000"/>
+              </a:lnSpc>
+              <a:spcAft>
+                <a:spcPts val="600"/>
+              </a:spcAft>
+            </a:pPr>
+            <a:r>
+              <a:rPr sz="1500" b="0">
+                <a:solidFill>
+                  <a:srgbClr val="475569"/>
                 </a:solidFill>
                 <a:latin typeface="Calibri"/>
-              </a:defRPr>
-            </a:pPr>
-            <a:r>
-              <a:t>Fonctionnalités Clés — Ce que l'outil gère</a:t>
-            </a:r>
-          </a:p>
-        </p:txBody>
-      </p:sp>
-      <p:sp>
-        <p:nvSpPr>
-          <p:cNvPr id="4" name="Rectangle 3"/>
+              </a:rPr>
+              <a:t>La « Time Machine » du Projet : Auditabilité &amp; Rétrospectives</a:t>
+            </a:r>
+          </a:p>
+        </p:txBody>
+      </p:sp>
+      <p:sp>
+        <p:nvSpPr>
+          <p:cNvPr id="6" name="Rectangle 5"/>
           <p:cNvSpPr/>
           <p:nvPr/>
         </p:nvSpPr>
         <p:spPr>
           <a:xfrm>
-            <a:off x="731520" y="1005840"/>
-            <a:ext cx="1828800" cy="50800"/>
+            <a:off x="658368" y="1993392"/>
+            <a:ext cx="2011680" cy="28000"/>
           </a:xfrm>
           <a:prstGeom prst="rect">
             <a:avLst/>
           </a:prstGeom>
           <a:solidFill>
-            <a:srgbClr val="2C6FEA"/>
+            <a:srgbClr val="0F172A"/>
           </a:solidFill>
           <a:ln>
             <a:noFill/>
           </a:ln>
+          <a:effectLst/>
         </p:spPr>
         <p:style>
           <a:lnRef idx="1">
@@ -4515,24 +5069,159 @@
       </p:sp>
       <p:sp>
         <p:nvSpPr>
-          <p:cNvPr id="5" name="Rounded Rectangle 4"/>
+          <p:cNvPr id="7" name="TextBox 6"/>
+          <p:cNvSpPr txBox="1"/>
+          <p:nvPr/>
+        </p:nvSpPr>
+        <p:spPr>
+          <a:xfrm>
+            <a:off x="658368" y="2423160"/>
+            <a:ext cx="10881360" cy="4114800"/>
+          </a:xfrm>
+          <a:prstGeom prst="rect">
+            <a:avLst/>
+          </a:prstGeom>
+          <a:noFill/>
+        </p:spPr>
+        <p:txBody>
+          <a:bodyPr wrap="square">
+            <a:spAutoFit/>
+          </a:bodyPr>
+          <a:lstStyle/>
+          <a:p>
+            <a:pPr>
+              <a:lnSpc>
+                <a:spcPct val="125000"/>
+              </a:lnSpc>
+              <a:spcAft>
+                <a:spcPts val="1400"/>
+              </a:spcAft>
+            </a:pPr>
+            <a:r>
+              <a:rPr sz="1700" b="1">
+                <a:solidFill>
+                  <a:srgbClr val="0F172A"/>
+                </a:solidFill>
+                <a:latin typeface="Calibri"/>
+              </a:rPr>
+              <a:t>▪  </a:t>
+            </a:r>
+            <a:r>
+              <a:rPr sz="1700" b="1">
+                <a:solidFill>
+                  <a:srgbClr val="0F172A"/>
+                </a:solidFill>
+                <a:latin typeface="Calibri"/>
+              </a:rPr>
+              <a:t>Compteur et Suivi des Daily</a:t>
+            </a:r>
+            <a:r>
+              <a:rPr sz="1700" b="0">
+                <a:solidFill>
+                  <a:srgbClr val="1E293B"/>
+                </a:solidFill>
+                <a:latin typeface="Calibri"/>
+              </a:rPr>
+              <a:t> : Suivi dynamique des Daily Scrums quotidiens (ex : X / 20) avec clôture définitive par le Scrum Master.</a:t>
+            </a:r>
+          </a:p>
+          <a:p>
+            <a:pPr>
+              <a:lnSpc>
+                <a:spcPct val="125000"/>
+              </a:lnSpc>
+              <a:spcAft>
+                <a:spcPts val="1400"/>
+              </a:spcAft>
+            </a:pPr>
+            <a:r>
+              <a:rPr sz="1700" b="1">
+                <a:solidFill>
+                  <a:srgbClr val="0F172A"/>
+                </a:solidFill>
+                <a:latin typeface="Calibri"/>
+              </a:rPr>
+              <a:t>▪  </a:t>
+            </a:r>
+            <a:r>
+              <a:rPr sz="1700" b="1">
+                <a:solidFill>
+                  <a:srgbClr val="0F172A"/>
+                </a:solidFill>
+                <a:latin typeface="Calibri"/>
+              </a:rPr>
+              <a:t>Typage des Notes Quotidiennes</a:t>
+            </a:r>
+            <a:r>
+              <a:rPr sz="1700" b="0">
+                <a:solidFill>
+                  <a:srgbClr val="1E293B"/>
+                </a:solidFill>
+                <a:latin typeface="Calibri"/>
+              </a:rPr>
+              <a:t> : Historique catégorisé par nature d'événement (Avancement, Obstacle/Blocage, Annonce).</a:t>
+            </a:r>
+          </a:p>
+          <a:p>
+            <a:pPr>
+              <a:lnSpc>
+                <a:spcPct val="125000"/>
+              </a:lnSpc>
+              <a:spcAft>
+                <a:spcPts val="1400"/>
+              </a:spcAft>
+            </a:pPr>
+            <a:r>
+              <a:rPr sz="1700" b="1">
+                <a:solidFill>
+                  <a:srgbClr val="0F172A"/>
+                </a:solidFill>
+                <a:latin typeface="Calibri"/>
+              </a:rPr>
+              <a:t>▪  </a:t>
+            </a:r>
+            <a:r>
+              <a:rPr sz="1700" b="1">
+                <a:solidFill>
+                  <a:srgbClr val="0F172A"/>
+                </a:solidFill>
+                <a:latin typeface="Calibri"/>
+              </a:rPr>
+              <a:t>Interface Épurée par Filtres</a:t>
+            </a:r>
+            <a:r>
+              <a:rPr sz="1700" b="0">
+                <a:solidFill>
+                  <a:srgbClr val="1E293B"/>
+                </a:solidFill>
+                <a:latin typeface="Calibri"/>
+              </a:rPr>
+              <a:t> : Sélection instantanée [Produit ➔ Sprint ➔ Timeline] évitant la surcharge cognitive pour l'audit.</a:t>
+            </a:r>
+          </a:p>
+        </p:txBody>
+      </p:sp>
+      <p:sp>
+        <p:nvSpPr>
+          <p:cNvPr id="8" name="Rectangle 7"/>
           <p:cNvSpPr/>
           <p:nvPr/>
         </p:nvSpPr>
         <p:spPr>
           <a:xfrm>
-            <a:off x="731520" y="1086965568000"/>
-            <a:ext cx="5303520" cy="822960"/>
-          </a:xfrm>
-          <a:prstGeom prst="roundRect">
+            <a:off x="0" y="6492240"/>
+            <a:ext cx="12191695" cy="19000"/>
+          </a:xfrm>
+          <a:prstGeom prst="rect">
             <a:avLst/>
           </a:prstGeom>
           <a:solidFill>
-            <a:srgbClr val="F5E6D6"/>
+            <a:srgbClr val="0F172A"/>
           </a:solidFill>
           <a:ln>
             <a:noFill/>
           </a:ln>
+          <a:effectLst/>
         </p:spPr>
         <p:style>
           <a:lnRef idx="1">
@@ -4558,24 +5247,93 @@
       </p:sp>
       <p:sp>
         <p:nvSpPr>
-          <p:cNvPr id="6" name="Rectangle 5"/>
+          <p:cNvPr id="9" name="TextBox 8"/>
+          <p:cNvSpPr txBox="1"/>
+          <p:nvPr/>
+        </p:nvSpPr>
+        <p:spPr>
+          <a:xfrm>
+            <a:off x="658368" y="6510528"/>
+            <a:ext cx="8229600" cy="274320"/>
+          </a:xfrm>
+          <a:prstGeom prst="rect">
+            <a:avLst/>
+          </a:prstGeom>
+          <a:noFill/>
+        </p:spPr>
+        <p:txBody>
+          <a:bodyPr wrap="square" anchor="t">
+            <a:spAutoFit/>
+          </a:bodyPr>
+          <a:lstStyle/>
+          <a:p>
+            <a:pPr algn="l">
+              <a:lnSpc>
+                <a:spcPct val="115000"/>
+              </a:lnSpc>
+              <a:spcAft>
+                <a:spcPts val="600"/>
+              </a:spcAft>
+            </a:pPr>
+            <a:r>
+              <a:rPr sz="1000" b="0">
+                <a:solidFill>
+                  <a:srgbClr val="475569"/>
+                </a:solidFill>
+                <a:latin typeface="Calibri"/>
+              </a:rPr>
+              <a:t>ScrumFirst  |  Direction Data &amp; Intelligence Artificielle</a:t>
+            </a:r>
+          </a:p>
+        </p:txBody>
+      </p:sp>
+    </p:spTree>
+  </p:cSld>
+  <p:clrMapOvr>
+    <a:masterClrMapping/>
+  </p:clrMapOvr>
+</p:sld>
+</file>
+
+<file path=ppt/slides/slide6.xml><?xml version="1.0" encoding="utf-8"?>
+<p:sld xmlns:a="http://schemas.openxmlformats.org/drawingml/2006/main" xmlns:p="http://schemas.openxmlformats.org/presentationml/2006/main" xmlns:r="http://schemas.openxmlformats.org/officeDocument/2006/relationships">
+  <p:cSld>
+    <p:bg>
+      <p:bgPr>
+        <a:solidFill>
+          <a:srgbClr val="F7F6F0"/>
+        </a:solidFill>
+        <a:effectLst/>
+      </p:bgPr>
+    </p:bg>
+    <p:spTree>
+      <p:nvGrpSpPr>
+        <p:cNvPr id="1" name=""/>
+        <p:cNvGrpSpPr/>
+        <p:nvPr/>
+      </p:nvGrpSpPr>
+      <p:grpSpPr/>
+      <p:sp>
+        <p:nvSpPr>
+          <p:cNvPr id="2" name="Rectangle 1"/>
           <p:cNvSpPr/>
           <p:nvPr/>
         </p:nvSpPr>
         <p:spPr>
           <a:xfrm>
-            <a:off x="731520" y="1086965568000"/>
-            <a:ext cx="5303520" cy="38100"/>
+            <a:off x="0" y="0"/>
+            <a:ext cx="164592" cy="6858000"/>
           </a:xfrm>
           <a:prstGeom prst="rect">
             <a:avLst/>
           </a:prstGeom>
           <a:solidFill>
-            <a:srgbClr val="2C6FEA"/>
+            <a:srgbClr val="0F172A"/>
           </a:solidFill>
           <a:ln>
             <a:noFill/>
           </a:ln>
+          <a:effectLst/>
         </p:spPr>
         <p:style>
           <a:lnRef idx="1">
@@ -4601,14 +5359,14 @@
       </p:sp>
       <p:sp>
         <p:nvSpPr>
-          <p:cNvPr id="7" name="TextBox 6"/>
+          <p:cNvPr id="3" name="TextBox 2"/>
           <p:cNvSpPr txBox="1"/>
           <p:nvPr/>
         </p:nvSpPr>
         <p:spPr>
           <a:xfrm>
-            <a:off x="914400" y="1086965659440"/>
-            <a:ext cx="4937760" cy="365760"/>
+            <a:off x="640080" y="411480"/>
+            <a:ext cx="1463040" cy="365760"/>
           </a:xfrm>
           <a:prstGeom prst="rect">
             <a:avLst/>
@@ -4616,35 +5374,41 @@
           <a:noFill/>
         </p:spPr>
         <p:txBody>
-          <a:bodyPr wrap="square">
+          <a:bodyPr wrap="square" anchor="t">
             <a:spAutoFit/>
           </a:bodyPr>
           <a:lstStyle/>
           <a:p>
             <a:pPr algn="l">
-              <a:defRPr sz="1300" b="1">
-                <a:solidFill>
-                  <a:srgbClr val="2C3E50"/>
-                </a:solidFill>
-                <a:latin typeface="Calibri"/>
-              </a:defRPr>
+              <a:lnSpc>
+                <a:spcPct val="115000"/>
+              </a:lnSpc>
+              <a:spcAft>
+                <a:spcPts val="600"/>
+              </a:spcAft>
             </a:pPr>
             <a:r>
-              <a:t>🗂️ Product Backlog</a:t>
-            </a:r>
-          </a:p>
-        </p:txBody>
-      </p:sp>
-      <p:sp>
-        <p:nvSpPr>
-          <p:cNvPr id="8" name="TextBox 7"/>
+              <a:rPr sz="1300" b="1">
+                <a:solidFill>
+                  <a:srgbClr val="475569"/>
+                </a:solidFill>
+                <a:latin typeface="Trebuchet MS"/>
+              </a:rPr>
+              <a:t>06</a:t>
+            </a:r>
+          </a:p>
+        </p:txBody>
+      </p:sp>
+      <p:sp>
+        <p:nvSpPr>
+          <p:cNvPr id="4" name="TextBox 3"/>
           <p:cNvSpPr txBox="1"/>
           <p:nvPr/>
         </p:nvSpPr>
         <p:spPr>
           <a:xfrm>
-            <a:off x="914400" y="1086965979480"/>
-            <a:ext cx="4937760" cy="365760"/>
+            <a:off x="640080" y="777240"/>
+            <a:ext cx="10881360" cy="914400"/>
           </a:xfrm>
           <a:prstGeom prst="rect">
             <a:avLst/>
@@ -4652,45 +5416,94 @@
           <a:noFill/>
         </p:spPr>
         <p:txBody>
-          <a:bodyPr wrap="square">
+          <a:bodyPr wrap="square" anchor="t">
             <a:spAutoFit/>
           </a:bodyPr>
           <a:lstStyle/>
           <a:p>
             <a:pPr algn="l">
-              <a:defRPr sz="1000" b="0">
-                <a:solidFill>
-                  <a:srgbClr val="4A4A4A"/>
+              <a:lnSpc>
+                <a:spcPct val="115000"/>
+              </a:lnSpc>
+              <a:spcAft>
+                <a:spcPts val="600"/>
+              </a:spcAft>
+            </a:pPr>
+            <a:r>
+              <a:rPr sz="3200" b="1">
+                <a:solidFill>
+                  <a:srgbClr val="0F172A"/>
+                </a:solidFill>
+                <a:latin typeface="Trebuchet MS"/>
+              </a:rPr>
+              <a:t>Un Moteur Relationnel Robuste et Performant</a:t>
+            </a:r>
+          </a:p>
+        </p:txBody>
+      </p:sp>
+      <p:sp>
+        <p:nvSpPr>
+          <p:cNvPr id="5" name="TextBox 4"/>
+          <p:cNvSpPr txBox="1"/>
+          <p:nvPr/>
+        </p:nvSpPr>
+        <p:spPr>
+          <a:xfrm>
+            <a:off x="658368" y="1554480"/>
+            <a:ext cx="10515600" cy="457200"/>
+          </a:xfrm>
+          <a:prstGeom prst="rect">
+            <a:avLst/>
+          </a:prstGeom>
+          <a:noFill/>
+        </p:spPr>
+        <p:txBody>
+          <a:bodyPr wrap="square" anchor="t">
+            <a:spAutoFit/>
+          </a:bodyPr>
+          <a:lstStyle/>
+          <a:p>
+            <a:pPr algn="l">
+              <a:lnSpc>
+                <a:spcPct val="115000"/>
+              </a:lnSpc>
+              <a:spcAft>
+                <a:spcPts val="600"/>
+              </a:spcAft>
+            </a:pPr>
+            <a:r>
+              <a:rPr sz="1500" b="0">
+                <a:solidFill>
+                  <a:srgbClr val="475569"/>
                 </a:solidFill>
                 <a:latin typeface="Calibri"/>
-              </a:defRPr>
-            </a:pPr>
-            <a:r>
-              <a:t>Product Backlog, estimation, Story Points, statut READY/REFINED/DONE, tri et ordonnancement PO uniquement</a:t>
-            </a:r>
-          </a:p>
-        </p:txBody>
-      </p:sp>
-      <p:sp>
-        <p:nvSpPr>
-          <p:cNvPr id="9" name="Rounded Rectangle 8"/>
+              </a:rPr>
+              <a:t>Architecture Technique &amp; Modèle de Données (Prisma / Postgres)</a:t>
+            </a:r>
+          </a:p>
+        </p:txBody>
+      </p:sp>
+      <p:sp>
+        <p:nvSpPr>
+          <p:cNvPr id="6" name="Rectangle 5"/>
           <p:cNvSpPr/>
           <p:nvPr/>
         </p:nvSpPr>
         <p:spPr>
           <a:xfrm>
-            <a:off x="6400800" y="1086965568000"/>
-            <a:ext cx="5303520" cy="822960"/>
-          </a:xfrm>
-          <a:prstGeom prst="roundRect">
+            <a:off x="658368" y="1993392"/>
+            <a:ext cx="2011680" cy="28000"/>
+          </a:xfrm>
+          <a:prstGeom prst="rect">
             <a:avLst/>
           </a:prstGeom>
           <a:solidFill>
-            <a:srgbClr val="F5E6D6"/>
+            <a:srgbClr val="0F172A"/>
           </a:solidFill>
           <a:ln>
             <a:noFill/>
           </a:ln>
+          <a:effectLst/>
         </p:spPr>
         <p:style>
           <a:lnRef idx="1">
@@ -4716,24 +5529,159 @@
       </p:sp>
       <p:sp>
         <p:nvSpPr>
-          <p:cNvPr id="10" name="Rectangle 9"/>
+          <p:cNvPr id="7" name="TextBox 6"/>
+          <p:cNvSpPr txBox="1"/>
+          <p:nvPr/>
+        </p:nvSpPr>
+        <p:spPr>
+          <a:xfrm>
+            <a:off x="658368" y="2423160"/>
+            <a:ext cx="10881360" cy="4114800"/>
+          </a:xfrm>
+          <a:prstGeom prst="rect">
+            <a:avLst/>
+          </a:prstGeom>
+          <a:noFill/>
+        </p:spPr>
+        <p:txBody>
+          <a:bodyPr wrap="square">
+            <a:spAutoFit/>
+          </a:bodyPr>
+          <a:lstStyle/>
+          <a:p>
+            <a:pPr>
+              <a:lnSpc>
+                <a:spcPct val="125000"/>
+              </a:lnSpc>
+              <a:spcAft>
+                <a:spcPts val="1400"/>
+              </a:spcAft>
+            </a:pPr>
+            <a:r>
+              <a:rPr sz="1700" b="1">
+                <a:solidFill>
+                  <a:srgbClr val="0F172A"/>
+                </a:solidFill>
+                <a:latin typeface="Calibri"/>
+              </a:rPr>
+              <a:t>▪  </a:t>
+            </a:r>
+            <a:r>
+              <a:rPr sz="1700" b="1">
+                <a:solidFill>
+                  <a:srgbClr val="0F172A"/>
+                </a:solidFill>
+                <a:latin typeface="Calibri"/>
+              </a:rPr>
+              <a:t>Modélisation SQL Propre</a:t>
+            </a:r>
+            <a:r>
+              <a:rPr sz="1700" b="0">
+                <a:solidFill>
+                  <a:srgbClr val="1E293B"/>
+                </a:solidFill>
+                <a:latin typeface="Calibri"/>
+              </a:rPr>
+              <a:t> : Tables interconnectées [Product ➔ BacklogItem ➔ Sprint ➔ Increment ➔ DailyNote].</a:t>
+            </a:r>
+          </a:p>
+          <a:p>
+            <a:pPr>
+              <a:lnSpc>
+                <a:spcPct val="125000"/>
+              </a:lnSpc>
+              <a:spcAft>
+                <a:spcPts val="1400"/>
+              </a:spcAft>
+            </a:pPr>
+            <a:r>
+              <a:rPr sz="1700" b="1">
+                <a:solidFill>
+                  <a:srgbClr val="0F172A"/>
+                </a:solidFill>
+                <a:latin typeface="Calibri"/>
+              </a:rPr>
+              <a:t>▪  </a:t>
+            </a:r>
+            <a:r>
+              <a:rPr sz="1700" b="1">
+                <a:solidFill>
+                  <a:srgbClr val="0F172A"/>
+                </a:solidFill>
+                <a:latin typeface="Calibri"/>
+              </a:rPr>
+              <a:t>Optimisation Algorithmique</a:t>
+            </a:r>
+            <a:r>
+              <a:rPr sz="1700" b="0">
+                <a:solidFill>
+                  <a:srgbClr val="1E293B"/>
+                </a:solidFill>
+                <a:latin typeface="Calibri"/>
+              </a:rPr>
+              <a:t> : Indexations complexes sur les clés stratégiques (teamId, productId, status) pour des temps de réponse instantanés sous forte charge.</a:t>
+            </a:r>
+          </a:p>
+          <a:p>
+            <a:pPr>
+              <a:lnSpc>
+                <a:spcPct val="125000"/>
+              </a:lnSpc>
+              <a:spcAft>
+                <a:spcPts val="1400"/>
+              </a:spcAft>
+            </a:pPr>
+            <a:r>
+              <a:rPr sz="1700" b="1">
+                <a:solidFill>
+                  <a:srgbClr val="0F172A"/>
+                </a:solidFill>
+                <a:latin typeface="Calibri"/>
+              </a:rPr>
+              <a:t>▪  </a:t>
+            </a:r>
+            <a:r>
+              <a:rPr sz="1700" b="1">
+                <a:solidFill>
+                  <a:srgbClr val="0F172A"/>
+                </a:solidFill>
+                <a:latin typeface="Calibri"/>
+              </a:rPr>
+              <a:t>Sécurité des Rôles</a:t>
+            </a:r>
+            <a:r>
+              <a:rPr sz="1700" b="0">
+                <a:solidFill>
+                  <a:srgbClr val="1E293B"/>
+                </a:solidFill>
+                <a:latin typeface="Calibri"/>
+              </a:rPr>
+              <a:t> : Matrice de droits d'accès étanche codée en dur (Scrum Team en écriture / Stakeholders en lecture seule absolue).</a:t>
+            </a:r>
+          </a:p>
+        </p:txBody>
+      </p:sp>
+      <p:sp>
+        <p:nvSpPr>
+          <p:cNvPr id="8" name="Rectangle 7"/>
           <p:cNvSpPr/>
           <p:nvPr/>
         </p:nvSpPr>
         <p:spPr>
           <a:xfrm>
-            <a:off x="6400800" y="1086965568000"/>
-            <a:ext cx="5303520" cy="38100"/>
+            <a:off x="0" y="6492240"/>
+            <a:ext cx="12191695" cy="19000"/>
           </a:xfrm>
           <a:prstGeom prst="rect">
             <a:avLst/>
           </a:prstGeom>
           <a:solidFill>
-            <a:srgbClr val="2C6FEA"/>
+            <a:srgbClr val="0F172A"/>
           </a:solidFill>
           <a:ln>
             <a:noFill/>
           </a:ln>
+          <a:effectLst/>
         </p:spPr>
         <p:style>
           <a:lnRef idx="1">
@@ -4759,14 +5707,14 @@
       </p:sp>
       <p:sp>
         <p:nvSpPr>
-          <p:cNvPr id="11" name="TextBox 10"/>
+          <p:cNvPr id="9" name="TextBox 8"/>
           <p:cNvSpPr txBox="1"/>
           <p:nvPr/>
         </p:nvSpPr>
         <p:spPr>
           <a:xfrm>
-            <a:off x="6583680" y="1086965659440"/>
-            <a:ext cx="4937760" cy="365760"/>
+            <a:off x="658368" y="6510528"/>
+            <a:ext cx="8229600" cy="274320"/>
           </a:xfrm>
           <a:prstGeom prst="rect">
             <a:avLst/>
@@ -4774,2955 +5722,27 @@
           <a:noFill/>
         </p:spPr>
         <p:txBody>
-          <a:bodyPr wrap="square">
+          <a:bodyPr wrap="square" anchor="t">
             <a:spAutoFit/>
           </a:bodyPr>
           <a:lstStyle/>
           <a:p>
             <a:pPr algn="l">
-              <a:defRPr sz="1300" b="1">
-                <a:solidFill>
-                  <a:srgbClr val="2C3E50"/>
-                </a:solidFill>
-                <a:latin typeface="Calibri"/>
-              </a:defRPr>
-            </a:pPr>
-            <a:r>
-              <a:t>📅 Sprint Planning</a:t>
-            </a:r>
-          </a:p>
-        </p:txBody>
-      </p:sp>
-      <p:sp>
-        <p:nvSpPr>
-          <p:cNvPr id="12" name="TextBox 11"/>
-          <p:cNvSpPr txBox="1"/>
-          <p:nvPr/>
-        </p:nvSpPr>
-        <p:spPr>
-          <a:xfrm>
-            <a:off x="6583680" y="1086965979480"/>
-            <a:ext cx="4937760" cy="365760"/>
-          </a:xfrm>
-          <a:prstGeom prst="rect">
-            <a:avLst/>
-          </a:prstGeom>
-          <a:noFill/>
-        </p:spPr>
-        <p:txBody>
-          <a:bodyPr wrap="square">
-            <a:spAutoFit/>
-          </a:bodyPr>
-          <a:lstStyle/>
-          <a:p>
-            <a:pPr algn="l">
-              <a:defRPr sz="1000" b="0">
-                <a:solidFill>
-                  <a:srgbClr val="4A4A4A"/>
-                </a:solidFill>
-                <a:latin typeface="Calibri"/>
-              </a:defRPr>
-            </a:pPr>
-            <a:r>
-              <a:t>Création sprint, items READY, time-box, objectif, chronos automatiques, gardes PO/SM/Dev · Sprints parallèles</a:t>
-            </a:r>
-          </a:p>
-        </p:txBody>
-      </p:sp>
-      <p:sp>
-        <p:nvSpPr>
-          <p:cNvPr id="13" name="Rounded Rectangle 12"/>
-          <p:cNvSpPr/>
-          <p:nvPr/>
-        </p:nvSpPr>
-        <p:spPr>
-          <a:xfrm>
-            <a:off x="731520" y="1964899296000"/>
-            <a:ext cx="5303520" cy="822960"/>
-          </a:xfrm>
-          <a:prstGeom prst="roundRect">
-            <a:avLst/>
-          </a:prstGeom>
-          <a:solidFill>
-            <a:srgbClr val="F5E6D6"/>
-          </a:solidFill>
-          <a:ln>
-            <a:noFill/>
-          </a:ln>
-        </p:spPr>
-        <p:style>
-          <a:lnRef idx="1">
-            <a:schemeClr val="accent1"/>
-          </a:lnRef>
-          <a:fillRef idx="3">
-            <a:schemeClr val="accent1"/>
-          </a:fillRef>
-          <a:effectRef idx="2">
-            <a:schemeClr val="accent1"/>
-          </a:effectRef>
-          <a:fontRef idx="minor">
-            <a:schemeClr val="lt1"/>
-          </a:fontRef>
-        </p:style>
-        <p:txBody>
-          <a:bodyPr rtlCol="0" anchor="ctr"/>
-          <a:lstStyle/>
-          <a:p>
-            <a:pPr algn="ctr"/>
-          </a:p>
-        </p:txBody>
-      </p:sp>
-      <p:sp>
-        <p:nvSpPr>
-          <p:cNvPr id="14" name="Rectangle 13"/>
-          <p:cNvSpPr/>
-          <p:nvPr/>
-        </p:nvSpPr>
-        <p:spPr>
-          <a:xfrm>
-            <a:off x="731520" y="1964899296000"/>
-            <a:ext cx="5303520" cy="38100"/>
-          </a:xfrm>
-          <a:prstGeom prst="rect">
-            <a:avLst/>
-          </a:prstGeom>
-          <a:solidFill>
-            <a:srgbClr val="2C6FEA"/>
-          </a:solidFill>
-          <a:ln>
-            <a:noFill/>
-          </a:ln>
-        </p:spPr>
-        <p:style>
-          <a:lnRef idx="1">
-            <a:schemeClr val="accent1"/>
-          </a:lnRef>
-          <a:fillRef idx="3">
-            <a:schemeClr val="accent1"/>
-          </a:fillRef>
-          <a:effectRef idx="2">
-            <a:schemeClr val="accent1"/>
-          </a:effectRef>
-          <a:fontRef idx="minor">
-            <a:schemeClr val="lt1"/>
-          </a:fontRef>
-        </p:style>
-        <p:txBody>
-          <a:bodyPr rtlCol="0" anchor="ctr"/>
-          <a:lstStyle/>
-          <a:p>
-            <a:pPr algn="ctr"/>
-          </a:p>
-        </p:txBody>
-      </p:sp>
-      <p:sp>
-        <p:nvSpPr>
-          <p:cNvPr id="15" name="TextBox 14"/>
-          <p:cNvSpPr txBox="1"/>
-          <p:nvPr/>
-        </p:nvSpPr>
-        <p:spPr>
-          <a:xfrm>
-            <a:off x="914400" y="1964899387440"/>
-            <a:ext cx="4937760" cy="365760"/>
-          </a:xfrm>
-          <a:prstGeom prst="rect">
-            <a:avLst/>
-          </a:prstGeom>
-          <a:noFill/>
-        </p:spPr>
-        <p:txBody>
-          <a:bodyPr wrap="square">
-            <a:spAutoFit/>
-          </a:bodyPr>
-          <a:lstStyle/>
-          <a:p>
-            <a:pPr algn="l">
-              <a:defRPr sz="1300" b="1">
-                <a:solidFill>
-                  <a:srgbClr val="2C3E50"/>
-                </a:solidFill>
-                <a:latin typeface="Calibri"/>
-              </a:defRPr>
-            </a:pPr>
-            <a:r>
-              <a:t>📊 Suivi Sprint</a:t>
-            </a:r>
-          </a:p>
-        </p:txBody>
-      </p:sp>
-      <p:sp>
-        <p:nvSpPr>
-          <p:cNvPr id="16" name="TextBox 15"/>
-          <p:cNvSpPr txBox="1"/>
-          <p:nvPr/>
-        </p:nvSpPr>
-        <p:spPr>
-          <a:xfrm>
-            <a:off x="914400" y="1964899707480"/>
-            <a:ext cx="4937760" cy="365760"/>
-          </a:xfrm>
-          <a:prstGeom prst="rect">
-            <a:avLst/>
-          </a:prstGeom>
-          <a:noFill/>
-        </p:spPr>
-        <p:txBody>
-          <a:bodyPr wrap="square">
-            <a:spAutoFit/>
-          </a:bodyPr>
-          <a:lstStyle/>
-          <a:p>
-            <a:pPr algn="l">
-              <a:defRPr sz="1000" b="0">
-                <a:solidFill>
-                  <a:srgbClr val="4A4A4A"/>
-                </a:solidFill>
-                <a:latin typeface="Calibri"/>
-              </a:defRPr>
-            </a:pPr>
-            <a:r>
-              <a:t>Kanban TODO→IN_PROGRESS→REVIEW→DOD, DoD 100% → Incrément, déplacement persistant, historique notes Daily</a:t>
-            </a:r>
-          </a:p>
-        </p:txBody>
-      </p:sp>
-      <p:sp>
-        <p:nvSpPr>
-          <p:cNvPr id="17" name="Rounded Rectangle 16"/>
-          <p:cNvSpPr/>
-          <p:nvPr/>
-        </p:nvSpPr>
-        <p:spPr>
-          <a:xfrm>
-            <a:off x="6400800" y="1964899296000"/>
-            <a:ext cx="5303520" cy="822960"/>
-          </a:xfrm>
-          <a:prstGeom prst="roundRect">
-            <a:avLst/>
-          </a:prstGeom>
-          <a:solidFill>
-            <a:srgbClr val="F5E6D6"/>
-          </a:solidFill>
-          <a:ln>
-            <a:noFill/>
-          </a:ln>
-        </p:spPr>
-        <p:style>
-          <a:lnRef idx="1">
-            <a:schemeClr val="accent1"/>
-          </a:lnRef>
-          <a:fillRef idx="3">
-            <a:schemeClr val="accent1"/>
-          </a:fillRef>
-          <a:effectRef idx="2">
-            <a:schemeClr val="accent1"/>
-          </a:effectRef>
-          <a:fontRef idx="minor">
-            <a:schemeClr val="lt1"/>
-          </a:fontRef>
-        </p:style>
-        <p:txBody>
-          <a:bodyPr rtlCol="0" anchor="ctr"/>
-          <a:lstStyle/>
-          <a:p>
-            <a:pPr algn="ctr"/>
-          </a:p>
-        </p:txBody>
-      </p:sp>
-      <p:sp>
-        <p:nvSpPr>
-          <p:cNvPr id="18" name="Rectangle 17"/>
-          <p:cNvSpPr/>
-          <p:nvPr/>
-        </p:nvSpPr>
-        <p:spPr>
-          <a:xfrm>
-            <a:off x="6400800" y="1964899296000"/>
-            <a:ext cx="5303520" cy="38100"/>
-          </a:xfrm>
-          <a:prstGeom prst="rect">
-            <a:avLst/>
-          </a:prstGeom>
-          <a:solidFill>
-            <a:srgbClr val="2C6FEA"/>
-          </a:solidFill>
-          <a:ln>
-            <a:noFill/>
-          </a:ln>
-        </p:spPr>
-        <p:style>
-          <a:lnRef idx="1">
-            <a:schemeClr val="accent1"/>
-          </a:lnRef>
-          <a:fillRef idx="3">
-            <a:schemeClr val="accent1"/>
-          </a:fillRef>
-          <a:effectRef idx="2">
-            <a:schemeClr val="accent1"/>
-          </a:effectRef>
-          <a:fontRef idx="minor">
-            <a:schemeClr val="lt1"/>
-          </a:fontRef>
-        </p:style>
-        <p:txBody>
-          <a:bodyPr rtlCol="0" anchor="ctr"/>
-          <a:lstStyle/>
-          <a:p>
-            <a:pPr algn="ctr"/>
-          </a:p>
-        </p:txBody>
-      </p:sp>
-      <p:sp>
-        <p:nvSpPr>
-          <p:cNvPr id="19" name="TextBox 18"/>
-          <p:cNvSpPr txBox="1"/>
-          <p:nvPr/>
-        </p:nvSpPr>
-        <p:spPr>
-          <a:xfrm>
-            <a:off x="6583680" y="1964899387440"/>
-            <a:ext cx="4937760" cy="365760"/>
-          </a:xfrm>
-          <a:prstGeom prst="rect">
-            <a:avLst/>
-          </a:prstGeom>
-          <a:noFill/>
-        </p:spPr>
-        <p:txBody>
-          <a:bodyPr wrap="square">
-            <a:spAutoFit/>
-          </a:bodyPr>
-          <a:lstStyle/>
-          <a:p>
-            <a:pPr algn="l">
-              <a:defRPr sz="1300" b="1">
-                <a:solidFill>
-                  <a:srgbClr val="2C3E50"/>
-                </a:solidFill>
-                <a:latin typeface="Calibri"/>
-              </a:defRPr>
-            </a:pPr>
-            <a:r>
-              <a:t>🔁 Daily Scrums</a:t>
-            </a:r>
-          </a:p>
-        </p:txBody>
-      </p:sp>
-      <p:sp>
-        <p:nvSpPr>
-          <p:cNvPr id="20" name="TextBox 19"/>
-          <p:cNvSpPr txBox="1"/>
-          <p:nvPr/>
-        </p:nvSpPr>
-        <p:spPr>
-          <a:xfrm>
-            <a:off x="6583680" y="1964899707480"/>
-            <a:ext cx="4937760" cy="365760"/>
-          </a:xfrm>
-          <a:prstGeom prst="rect">
-            <a:avLst/>
-          </a:prstGeom>
-          <a:noFill/>
-        </p:spPr>
-        <p:txBody>
-          <a:bodyPr wrap="square">
-            <a:spAutoFit/>
-          </a:bodyPr>
-          <a:lstStyle/>
-          <a:p>
-            <a:pPr algn="l">
-              <a:defRPr sz="1000" b="0">
-                <a:solidFill>
-                  <a:srgbClr val="4A4A4A"/>
-                </a:solidFill>
-                <a:latin typeface="Calibri"/>
-              </a:defRPr>
-            </a:pPr>
-            <a:r>
-              <a:t>Compteur dynamique X / TOTAL (modifiable SM), ✓ Valider du jour, 🛑 Clôture définitive, barre verte, débloque Review</a:t>
-            </a:r>
-          </a:p>
-        </p:txBody>
-      </p:sp>
-      <p:sp>
-        <p:nvSpPr>
-          <p:cNvPr id="21" name="Rounded Rectangle 20"/>
-          <p:cNvSpPr/>
-          <p:nvPr/>
-        </p:nvSpPr>
-        <p:spPr>
-          <a:xfrm>
-            <a:off x="731520" y="2842833024000"/>
-            <a:ext cx="5303520" cy="822960"/>
-          </a:xfrm>
-          <a:prstGeom prst="roundRect">
-            <a:avLst/>
-          </a:prstGeom>
-          <a:solidFill>
-            <a:srgbClr val="F5E6D6"/>
-          </a:solidFill>
-          <a:ln>
-            <a:noFill/>
-          </a:ln>
-        </p:spPr>
-        <p:style>
-          <a:lnRef idx="1">
-            <a:schemeClr val="accent1"/>
-          </a:lnRef>
-          <a:fillRef idx="3">
-            <a:schemeClr val="accent1"/>
-          </a:fillRef>
-          <a:effectRef idx="2">
-            <a:schemeClr val="accent1"/>
-          </a:effectRef>
-          <a:fontRef idx="minor">
-            <a:schemeClr val="lt1"/>
-          </a:fontRef>
-        </p:style>
-        <p:txBody>
-          <a:bodyPr rtlCol="0" anchor="ctr"/>
-          <a:lstStyle/>
-          <a:p>
-            <a:pPr algn="ctr"/>
-          </a:p>
-        </p:txBody>
-      </p:sp>
-      <p:sp>
-        <p:nvSpPr>
-          <p:cNvPr id="22" name="Rectangle 21"/>
-          <p:cNvSpPr/>
-          <p:nvPr/>
-        </p:nvSpPr>
-        <p:spPr>
-          <a:xfrm>
-            <a:off x="731520" y="2842833024000"/>
-            <a:ext cx="5303520" cy="38100"/>
-          </a:xfrm>
-          <a:prstGeom prst="rect">
-            <a:avLst/>
-          </a:prstGeom>
-          <a:solidFill>
-            <a:srgbClr val="2C6FEA"/>
-          </a:solidFill>
-          <a:ln>
-            <a:noFill/>
-          </a:ln>
-        </p:spPr>
-        <p:style>
-          <a:lnRef idx="1">
-            <a:schemeClr val="accent1"/>
-          </a:lnRef>
-          <a:fillRef idx="3">
-            <a:schemeClr val="accent1"/>
-          </a:fillRef>
-          <a:effectRef idx="2">
-            <a:schemeClr val="accent1"/>
-          </a:effectRef>
-          <a:fontRef idx="minor">
-            <a:schemeClr val="lt1"/>
-          </a:fontRef>
-        </p:style>
-        <p:txBody>
-          <a:bodyPr rtlCol="0" anchor="ctr"/>
-          <a:lstStyle/>
-          <a:p>
-            <a:pPr algn="ctr"/>
-          </a:p>
-        </p:txBody>
-      </p:sp>
-      <p:sp>
-        <p:nvSpPr>
-          <p:cNvPr id="23" name="TextBox 22"/>
-          <p:cNvSpPr txBox="1"/>
-          <p:nvPr/>
-        </p:nvSpPr>
-        <p:spPr>
-          <a:xfrm>
-            <a:off x="914400" y="2842833115440"/>
-            <a:ext cx="4937760" cy="365760"/>
-          </a:xfrm>
-          <a:prstGeom prst="rect">
-            <a:avLst/>
-          </a:prstGeom>
-          <a:noFill/>
-        </p:spPr>
-        <p:txBody>
-          <a:bodyPr wrap="square">
-            <a:spAutoFit/>
-          </a:bodyPr>
-          <a:lstStyle/>
-          <a:p>
-            <a:pPr algn="l">
-              <a:defRPr sz="1300" b="1">
-                <a:solidFill>
-                  <a:srgbClr val="2C3E50"/>
-                </a:solidFill>
-                <a:latin typeface="Calibri"/>
-              </a:defRPr>
-            </a:pPr>
-            <a:r>
-              <a:t>📣 Sprint Review</a:t>
-            </a:r>
-          </a:p>
-        </p:txBody>
-      </p:sp>
-      <p:sp>
-        <p:nvSpPr>
-          <p:cNvPr id="24" name="TextBox 23"/>
-          <p:cNvSpPr txBox="1"/>
-          <p:nvPr/>
-        </p:nvSpPr>
-        <p:spPr>
-          <a:xfrm>
-            <a:off x="914400" y="2842833435480"/>
-            <a:ext cx="4937760" cy="365760"/>
-          </a:xfrm>
-          <a:prstGeom prst="rect">
-            <a:avLst/>
-          </a:prstGeom>
-          <a:noFill/>
-        </p:spPr>
-        <p:txBody>
-          <a:bodyPr wrap="square">
-            <a:spAutoFit/>
-          </a:bodyPr>
-          <a:lstStyle/>
-          <a:p>
-            <a:pPr algn="l">
-              <a:defRPr sz="1000" b="0">
-                <a:solidFill>
-                  <a:srgbClr val="4A4A4A"/>
-                </a:solidFill>
-                <a:latin typeface="Calibri"/>
-              </a:defRPr>
-            </a:pPr>
-            <a:r>
-              <a:t>2 colonnes : synthèse Scrum Team (écriture PO/SM/Dev, sh@ lecture seule) + retours Stakeholders (écriture sh@ uniquement)</a:t>
-            </a:r>
-          </a:p>
-        </p:txBody>
-      </p:sp>
-      <p:sp>
-        <p:nvSpPr>
-          <p:cNvPr id="25" name="Rounded Rectangle 24"/>
-          <p:cNvSpPr/>
-          <p:nvPr/>
-        </p:nvSpPr>
-        <p:spPr>
-          <a:xfrm>
-            <a:off x="6400800" y="2842833024000"/>
-            <a:ext cx="5303520" cy="822960"/>
-          </a:xfrm>
-          <a:prstGeom prst="roundRect">
-            <a:avLst/>
-          </a:prstGeom>
-          <a:solidFill>
-            <a:srgbClr val="F5E6D6"/>
-          </a:solidFill>
-          <a:ln>
-            <a:noFill/>
-          </a:ln>
-        </p:spPr>
-        <p:style>
-          <a:lnRef idx="1">
-            <a:schemeClr val="accent1"/>
-          </a:lnRef>
-          <a:fillRef idx="3">
-            <a:schemeClr val="accent1"/>
-          </a:fillRef>
-          <a:effectRef idx="2">
-            <a:schemeClr val="accent1"/>
-          </a:effectRef>
-          <a:fontRef idx="minor">
-            <a:schemeClr val="lt1"/>
-          </a:fontRef>
-        </p:style>
-        <p:txBody>
-          <a:bodyPr rtlCol="0" anchor="ctr"/>
-          <a:lstStyle/>
-          <a:p>
-            <a:pPr algn="ctr"/>
-          </a:p>
-        </p:txBody>
-      </p:sp>
-      <p:sp>
-        <p:nvSpPr>
-          <p:cNvPr id="26" name="Rectangle 25"/>
-          <p:cNvSpPr/>
-          <p:nvPr/>
-        </p:nvSpPr>
-        <p:spPr>
-          <a:xfrm>
-            <a:off x="6400800" y="2842833024000"/>
-            <a:ext cx="5303520" cy="38100"/>
-          </a:xfrm>
-          <a:prstGeom prst="rect">
-            <a:avLst/>
-          </a:prstGeom>
-          <a:solidFill>
-            <a:srgbClr val="2C6FEA"/>
-          </a:solidFill>
-          <a:ln>
-            <a:noFill/>
-          </a:ln>
-        </p:spPr>
-        <p:style>
-          <a:lnRef idx="1">
-            <a:schemeClr val="accent1"/>
-          </a:lnRef>
-          <a:fillRef idx="3">
-            <a:schemeClr val="accent1"/>
-          </a:fillRef>
-          <a:effectRef idx="2">
-            <a:schemeClr val="accent1"/>
-          </a:effectRef>
-          <a:fontRef idx="minor">
-            <a:schemeClr val="lt1"/>
-          </a:fontRef>
-        </p:style>
-        <p:txBody>
-          <a:bodyPr rtlCol="0" anchor="ctr"/>
-          <a:lstStyle/>
-          <a:p>
-            <a:pPr algn="ctr"/>
-          </a:p>
-        </p:txBody>
-      </p:sp>
-      <p:sp>
-        <p:nvSpPr>
-          <p:cNvPr id="27" name="TextBox 26"/>
-          <p:cNvSpPr txBox="1"/>
-          <p:nvPr/>
-        </p:nvSpPr>
-        <p:spPr>
-          <a:xfrm>
-            <a:off x="6583680" y="2842833115440"/>
-            <a:ext cx="4937760" cy="365760"/>
-          </a:xfrm>
-          <a:prstGeom prst="rect">
-            <a:avLst/>
-          </a:prstGeom>
-          <a:noFill/>
-        </p:spPr>
-        <p:txBody>
-          <a:bodyPr wrap="square">
-            <a:spAutoFit/>
-          </a:bodyPr>
-          <a:lstStyle/>
-          <a:p>
-            <a:pPr algn="l">
-              <a:defRPr sz="1300" b="1">
-                <a:solidFill>
-                  <a:srgbClr val="2C3E50"/>
-                </a:solidFill>
-                <a:latin typeface="Calibri"/>
-              </a:defRPr>
-            </a:pPr>
-            <a:r>
-              <a:t>💡 Rétrospective</a:t>
-            </a:r>
-          </a:p>
-        </p:txBody>
-      </p:sp>
-      <p:sp>
-        <p:nvSpPr>
-          <p:cNvPr id="28" name="TextBox 27"/>
-          <p:cNvSpPr txBox="1"/>
-          <p:nvPr/>
-        </p:nvSpPr>
-        <p:spPr>
-          <a:xfrm>
-            <a:off x="6583680" y="2842833435480"/>
-            <a:ext cx="4937760" cy="365760"/>
-          </a:xfrm>
-          <a:prstGeom prst="rect">
-            <a:avLst/>
-          </a:prstGeom>
-          <a:noFill/>
-        </p:spPr>
-        <p:txBody>
-          <a:bodyPr wrap="square">
-            <a:spAutoFit/>
-          </a:bodyPr>
-          <a:lstStyle/>
-          <a:p>
-            <a:pPr algn="l">
-              <a:defRPr sz="1000" b="0">
-                <a:solidFill>
-                  <a:srgbClr val="4A4A4A"/>
-                </a:solidFill>
-                <a:latin typeface="Calibri"/>
-              </a:defRPr>
-            </a:pPr>
-            <a:r>
-              <a:t>3 colonnes WENT_WELL / TO_IMPROVE / IDEAS, plan d'actions officiel, idées post-its persistées en base</a:t>
-            </a:r>
-          </a:p>
-        </p:txBody>
-      </p:sp>
-    </p:spTree>
-  </p:cSld>
-  <p:clrMapOvr>
-    <a:masterClrMapping/>
-  </p:clrMapOvr>
-</p:sld>
-</file>
-
-<file path=ppt/slides/slide5.xml><?xml version="1.0" encoding="utf-8"?>
-<p:sld xmlns:a="http://schemas.openxmlformats.org/drawingml/2006/main" xmlns:p="http://schemas.openxmlformats.org/presentationml/2006/main" xmlns:r="http://schemas.openxmlformats.org/officeDocument/2006/relationships">
-  <p:cSld>
-    <p:bg>
-      <p:bgPr>
-        <a:solidFill>
-          <a:srgbClr val="FFFFFF"/>
-        </a:solidFill>
-        <a:effectLst/>
-      </p:bgPr>
-    </p:bg>
-    <p:spTree>
-      <p:nvGrpSpPr>
-        <p:cNvPr id="1" name=""/>
-        <p:cNvGrpSpPr/>
-        <p:nvPr/>
-      </p:nvGrpSpPr>
-      <p:grpSpPr/>
-      <p:sp>
-        <p:nvSpPr>
-          <p:cNvPr id="2" name="Rectangle 1"/>
-          <p:cNvSpPr/>
-          <p:nvPr/>
-        </p:nvSpPr>
-        <p:spPr>
-          <a:xfrm>
-            <a:off x="0" y="0"/>
-            <a:ext cx="12191695" cy="101600"/>
-          </a:xfrm>
-          <a:prstGeom prst="rect">
-            <a:avLst/>
-          </a:prstGeom>
-          <a:solidFill>
-            <a:srgbClr val="2C6FEA"/>
-          </a:solidFill>
-          <a:ln>
-            <a:noFill/>
-          </a:ln>
-        </p:spPr>
-        <p:style>
-          <a:lnRef idx="1">
-            <a:schemeClr val="accent1"/>
-          </a:lnRef>
-          <a:fillRef idx="3">
-            <a:schemeClr val="accent1"/>
-          </a:fillRef>
-          <a:effectRef idx="2">
-            <a:schemeClr val="accent1"/>
-          </a:effectRef>
-          <a:fontRef idx="minor">
-            <a:schemeClr val="lt1"/>
-          </a:fontRef>
-        </p:style>
-        <p:txBody>
-          <a:bodyPr rtlCol="0" anchor="ctr"/>
-          <a:lstStyle/>
-          <a:p>
-            <a:pPr algn="ctr"/>
-          </a:p>
-        </p:txBody>
-      </p:sp>
-      <p:sp>
-        <p:nvSpPr>
-          <p:cNvPr id="3" name="TextBox 2"/>
-          <p:cNvSpPr txBox="1"/>
-          <p:nvPr/>
-        </p:nvSpPr>
-        <p:spPr>
-          <a:xfrm>
-            <a:off x="731520" y="365760"/>
-            <a:ext cx="10058400" cy="640080"/>
-          </a:xfrm>
-          <a:prstGeom prst="rect">
-            <a:avLst/>
-          </a:prstGeom>
-          <a:noFill/>
-        </p:spPr>
-        <p:txBody>
-          <a:bodyPr wrap="square">
-            <a:spAutoFit/>
-          </a:bodyPr>
-          <a:lstStyle/>
-          <a:p>
-            <a:pPr algn="l">
-              <a:defRPr sz="3000" b="1">
-                <a:solidFill>
-                  <a:srgbClr val="2C3E50"/>
-                </a:solidFill>
-                <a:latin typeface="Calibri"/>
-              </a:defRPr>
-            </a:pPr>
-            <a:r>
-              <a:t>Architecture Technique</a:t>
-            </a:r>
-          </a:p>
-        </p:txBody>
-      </p:sp>
-      <p:sp>
-        <p:nvSpPr>
-          <p:cNvPr id="4" name="Rectangle 3"/>
-          <p:cNvSpPr/>
-          <p:nvPr/>
-        </p:nvSpPr>
-        <p:spPr>
-          <a:xfrm>
-            <a:off x="731520" y="1005840"/>
-            <a:ext cx="1828800" cy="50800"/>
-          </a:xfrm>
-          <a:prstGeom prst="rect">
-            <a:avLst/>
-          </a:prstGeom>
-          <a:solidFill>
-            <a:srgbClr val="2C6FEA"/>
-          </a:solidFill>
-          <a:ln>
-            <a:noFill/>
-          </a:ln>
-        </p:spPr>
-        <p:style>
-          <a:lnRef idx="1">
-            <a:schemeClr val="accent1"/>
-          </a:lnRef>
-          <a:fillRef idx="3">
-            <a:schemeClr val="accent1"/>
-          </a:fillRef>
-          <a:effectRef idx="2">
-            <a:schemeClr val="accent1"/>
-          </a:effectRef>
-          <a:fontRef idx="minor">
-            <a:schemeClr val="lt1"/>
-          </a:fontRef>
-        </p:style>
-        <p:txBody>
-          <a:bodyPr rtlCol="0" anchor="ctr"/>
-          <a:lstStyle/>
-          <a:p>
-            <a:pPr algn="ctr"/>
-          </a:p>
-        </p:txBody>
-      </p:sp>
-      <p:sp>
-        <p:nvSpPr>
-          <p:cNvPr id="5" name="Rounded Rectangle 4"/>
-          <p:cNvSpPr/>
-          <p:nvPr/>
-        </p:nvSpPr>
-        <p:spPr>
-          <a:xfrm>
-            <a:off x="731520" y="1371600"/>
-            <a:ext cx="1737360" cy="2560320"/>
-          </a:xfrm>
-          <a:prstGeom prst="roundRect">
-            <a:avLst/>
-          </a:prstGeom>
-          <a:solidFill>
-            <a:srgbClr val="F2F2F2"/>
-          </a:solidFill>
-          <a:ln>
-            <a:noFill/>
-          </a:ln>
-        </p:spPr>
-        <p:style>
-          <a:lnRef idx="1">
-            <a:schemeClr val="accent1"/>
-          </a:lnRef>
-          <a:fillRef idx="3">
-            <a:schemeClr val="accent1"/>
-          </a:fillRef>
-          <a:effectRef idx="2">
-            <a:schemeClr val="accent1"/>
-          </a:effectRef>
-          <a:fontRef idx="minor">
-            <a:schemeClr val="lt1"/>
-          </a:fontRef>
-        </p:style>
-        <p:txBody>
-          <a:bodyPr rtlCol="0" anchor="ctr"/>
-          <a:lstStyle/>
-          <a:p>
-            <a:pPr algn="ctr"/>
-          </a:p>
-        </p:txBody>
-      </p:sp>
-      <p:sp>
-        <p:nvSpPr>
-          <p:cNvPr id="6" name="Rectangle 5"/>
-          <p:cNvSpPr/>
-          <p:nvPr/>
-        </p:nvSpPr>
-        <p:spPr>
-          <a:xfrm>
-            <a:off x="731520" y="1371600"/>
-            <a:ext cx="1737360" cy="63500"/>
-          </a:xfrm>
-          <a:prstGeom prst="rect">
-            <a:avLst/>
-          </a:prstGeom>
-          <a:solidFill>
-            <a:srgbClr val="2C6FEA"/>
-          </a:solidFill>
-          <a:ln>
-            <a:noFill/>
-          </a:ln>
-        </p:spPr>
-        <p:style>
-          <a:lnRef idx="1">
-            <a:schemeClr val="accent1"/>
-          </a:lnRef>
-          <a:fillRef idx="3">
-            <a:schemeClr val="accent1"/>
-          </a:fillRef>
-          <a:effectRef idx="2">
-            <a:schemeClr val="accent1"/>
-          </a:effectRef>
-          <a:fontRef idx="minor">
-            <a:schemeClr val="lt1"/>
-          </a:fontRef>
-        </p:style>
-        <p:txBody>
-          <a:bodyPr rtlCol="0" anchor="ctr"/>
-          <a:lstStyle/>
-          <a:p>
-            <a:pPr algn="ctr"/>
-          </a:p>
-        </p:txBody>
-      </p:sp>
-      <p:sp>
-        <p:nvSpPr>
-          <p:cNvPr id="7" name="TextBox 6"/>
-          <p:cNvSpPr txBox="1"/>
-          <p:nvPr/>
-        </p:nvSpPr>
-        <p:spPr>
-          <a:xfrm>
-            <a:off x="822960" y="1508760"/>
-            <a:ext cx="1554480" cy="457200"/>
-          </a:xfrm>
-          <a:prstGeom prst="rect">
-            <a:avLst/>
-          </a:prstGeom>
-          <a:noFill/>
-        </p:spPr>
-        <p:txBody>
-          <a:bodyPr wrap="square">
-            <a:spAutoFit/>
-          </a:bodyPr>
-          <a:lstStyle/>
-          <a:p>
-            <a:pPr algn="ctr">
-              <a:defRPr sz="1300" b="1">
-                <a:solidFill>
-                  <a:srgbClr val="FFFFFF"/>
-                </a:solidFill>
-                <a:latin typeface="Calibri"/>
-              </a:defRPr>
-            </a:pPr>
-            <a:r>
-              <a:t>Next.js 14</a:t>
-            </a:r>
-          </a:p>
-        </p:txBody>
-      </p:sp>
-      <p:sp>
-        <p:nvSpPr>
-          <p:cNvPr id="8" name="TextBox 7"/>
-          <p:cNvSpPr txBox="1"/>
-          <p:nvPr/>
-        </p:nvSpPr>
-        <p:spPr>
-          <a:xfrm>
-            <a:off x="822960" y="2011680"/>
-            <a:ext cx="1554480" cy="1828800"/>
-          </a:xfrm>
-          <a:prstGeom prst="rect">
-            <a:avLst/>
-          </a:prstGeom>
-          <a:noFill/>
-        </p:spPr>
-        <p:txBody>
-          <a:bodyPr wrap="square">
-            <a:spAutoFit/>
-          </a:bodyPr>
-          <a:lstStyle/>
-          <a:p>
-            <a:pPr algn="ctr">
-              <a:defRPr sz="1000" b="0">
-                <a:solidFill>
-                  <a:srgbClr val="4A4A4A"/>
-                </a:solidFill>
-                <a:latin typeface="Calibri"/>
-              </a:defRPr>
-            </a:pPr>
-            <a:r>
-              <a:t>App Router, Server Actions, typescript, Routes Handlers</a:t>
-            </a:r>
-          </a:p>
-        </p:txBody>
-      </p:sp>
-      <p:sp>
-        <p:nvSpPr>
-          <p:cNvPr id="9" name="Rounded Rectangle 8"/>
-          <p:cNvSpPr/>
-          <p:nvPr/>
-        </p:nvSpPr>
-        <p:spPr>
-          <a:xfrm>
-            <a:off x="2606039" y="1371600"/>
-            <a:ext cx="1737360" cy="2560320"/>
-          </a:xfrm>
-          <a:prstGeom prst="roundRect">
-            <a:avLst/>
-          </a:prstGeom>
-          <a:solidFill>
-            <a:srgbClr val="F2F2F2"/>
-          </a:solidFill>
-          <a:ln>
-            <a:noFill/>
-          </a:ln>
-        </p:spPr>
-        <p:style>
-          <a:lnRef idx="1">
-            <a:schemeClr val="accent1"/>
-          </a:lnRef>
-          <a:fillRef idx="3">
-            <a:schemeClr val="accent1"/>
-          </a:fillRef>
-          <a:effectRef idx="2">
-            <a:schemeClr val="accent1"/>
-          </a:effectRef>
-          <a:fontRef idx="minor">
-            <a:schemeClr val="lt1"/>
-          </a:fontRef>
-        </p:style>
-        <p:txBody>
-          <a:bodyPr rtlCol="0" anchor="ctr"/>
-          <a:lstStyle/>
-          <a:p>
-            <a:pPr algn="ctr"/>
-          </a:p>
-        </p:txBody>
-      </p:sp>
-      <p:sp>
-        <p:nvSpPr>
-          <p:cNvPr id="10" name="Rectangle 9"/>
-          <p:cNvSpPr/>
-          <p:nvPr/>
-        </p:nvSpPr>
-        <p:spPr>
-          <a:xfrm>
-            <a:off x="2606039" y="1371600"/>
-            <a:ext cx="1737360" cy="63500"/>
-          </a:xfrm>
-          <a:prstGeom prst="rect">
-            <a:avLst/>
-          </a:prstGeom>
-          <a:solidFill>
-            <a:srgbClr val="27AE60"/>
-          </a:solidFill>
-          <a:ln>
-            <a:noFill/>
-          </a:ln>
-        </p:spPr>
-        <p:style>
-          <a:lnRef idx="1">
-            <a:schemeClr val="accent1"/>
-          </a:lnRef>
-          <a:fillRef idx="3">
-            <a:schemeClr val="accent1"/>
-          </a:fillRef>
-          <a:effectRef idx="2">
-            <a:schemeClr val="accent1"/>
-          </a:effectRef>
-          <a:fontRef idx="minor">
-            <a:schemeClr val="lt1"/>
-          </a:fontRef>
-        </p:style>
-        <p:txBody>
-          <a:bodyPr rtlCol="0" anchor="ctr"/>
-          <a:lstStyle/>
-          <a:p>
-            <a:pPr algn="ctr"/>
-          </a:p>
-        </p:txBody>
-      </p:sp>
-      <p:sp>
-        <p:nvSpPr>
-          <p:cNvPr id="11" name="TextBox 10"/>
-          <p:cNvSpPr txBox="1"/>
-          <p:nvPr/>
-        </p:nvSpPr>
-        <p:spPr>
-          <a:xfrm>
-            <a:off x="2697479" y="1508760"/>
-            <a:ext cx="1554480" cy="457200"/>
-          </a:xfrm>
-          <a:prstGeom prst="rect">
-            <a:avLst/>
-          </a:prstGeom>
-          <a:noFill/>
-        </p:spPr>
-        <p:txBody>
-          <a:bodyPr wrap="square">
-            <a:spAutoFit/>
-          </a:bodyPr>
-          <a:lstStyle/>
-          <a:p>
-            <a:pPr algn="ctr">
-              <a:defRPr sz="1300" b="1">
-                <a:solidFill>
-                  <a:srgbClr val="FFFFFF"/>
-                </a:solidFill>
-                <a:latin typeface="Calibri"/>
-              </a:defRPr>
-            </a:pPr>
-            <a:r>
-              <a:t>Prisma ORM</a:t>
-            </a:r>
-          </a:p>
-        </p:txBody>
-      </p:sp>
-      <p:sp>
-        <p:nvSpPr>
-          <p:cNvPr id="12" name="TextBox 11"/>
-          <p:cNvSpPr txBox="1"/>
-          <p:nvPr/>
-        </p:nvSpPr>
-        <p:spPr>
-          <a:xfrm>
-            <a:off x="2697479" y="2011680"/>
-            <a:ext cx="1554480" cy="1828800"/>
-          </a:xfrm>
-          <a:prstGeom prst="rect">
-            <a:avLst/>
-          </a:prstGeom>
-          <a:noFill/>
-        </p:spPr>
-        <p:txBody>
-          <a:bodyPr wrap="square">
-            <a:spAutoFit/>
-          </a:bodyPr>
-          <a:lstStyle/>
-          <a:p>
-            <a:pPr algn="ctr">
-              <a:defRPr sz="1000" b="0">
-                <a:solidFill>
-                  <a:srgbClr val="4A4A4A"/>
-                </a:solidFill>
-                <a:latin typeface="Calibri"/>
-              </a:defRPr>
-            </a:pPr>
-            <a:r>
-              <a:t>PostgreSQL, schema.prisma, db push, migration sans pain, client JS</a:t>
-            </a:r>
-          </a:p>
-        </p:txBody>
-      </p:sp>
-      <p:sp>
-        <p:nvSpPr>
-          <p:cNvPr id="13" name="Rounded Rectangle 12"/>
-          <p:cNvSpPr/>
-          <p:nvPr/>
-        </p:nvSpPr>
-        <p:spPr>
-          <a:xfrm>
-            <a:off x="4480558" y="1371600"/>
-            <a:ext cx="1737360" cy="2560320"/>
-          </a:xfrm>
-          <a:prstGeom prst="roundRect">
-            <a:avLst/>
-          </a:prstGeom>
-          <a:solidFill>
-            <a:srgbClr val="F2F2F2"/>
-          </a:solidFill>
-          <a:ln>
-            <a:noFill/>
-          </a:ln>
-        </p:spPr>
-        <p:style>
-          <a:lnRef idx="1">
-            <a:schemeClr val="accent1"/>
-          </a:lnRef>
-          <a:fillRef idx="3">
-            <a:schemeClr val="accent1"/>
-          </a:fillRef>
-          <a:effectRef idx="2">
-            <a:schemeClr val="accent1"/>
-          </a:effectRef>
-          <a:fontRef idx="minor">
-            <a:schemeClr val="lt1"/>
-          </a:fontRef>
-        </p:style>
-        <p:txBody>
-          <a:bodyPr rtlCol="0" anchor="ctr"/>
-          <a:lstStyle/>
-          <a:p>
-            <a:pPr algn="ctr"/>
-          </a:p>
-        </p:txBody>
-      </p:sp>
-      <p:sp>
-        <p:nvSpPr>
-          <p:cNvPr id="14" name="Rectangle 13"/>
-          <p:cNvSpPr/>
-          <p:nvPr/>
-        </p:nvSpPr>
-        <p:spPr>
-          <a:xfrm>
-            <a:off x="4480558" y="1371600"/>
-            <a:ext cx="1737360" cy="63500"/>
-          </a:xfrm>
-          <a:prstGeom prst="rect">
-            <a:avLst/>
-          </a:prstGeom>
-          <a:solidFill>
-            <a:srgbClr val="6C0A5B"/>
-          </a:solidFill>
-          <a:ln>
-            <a:noFill/>
-          </a:ln>
-        </p:spPr>
-        <p:style>
-          <a:lnRef idx="1">
-            <a:schemeClr val="accent1"/>
-          </a:lnRef>
-          <a:fillRef idx="3">
-            <a:schemeClr val="accent1"/>
-          </a:fillRef>
-          <a:effectRef idx="2">
-            <a:schemeClr val="accent1"/>
-          </a:effectRef>
-          <a:fontRef idx="minor">
-            <a:schemeClr val="lt1"/>
-          </a:fontRef>
-        </p:style>
-        <p:txBody>
-          <a:bodyPr rtlCol="0" anchor="ctr"/>
-          <a:lstStyle/>
-          <a:p>
-            <a:pPr algn="ctr"/>
-          </a:p>
-        </p:txBody>
-      </p:sp>
-      <p:sp>
-        <p:nvSpPr>
-          <p:cNvPr id="15" name="TextBox 14"/>
-          <p:cNvSpPr txBox="1"/>
-          <p:nvPr/>
-        </p:nvSpPr>
-        <p:spPr>
-          <a:xfrm>
-            <a:off x="4571998" y="1508760"/>
-            <a:ext cx="1554480" cy="457200"/>
-          </a:xfrm>
-          <a:prstGeom prst="rect">
-            <a:avLst/>
-          </a:prstGeom>
-          <a:noFill/>
-        </p:spPr>
-        <p:txBody>
-          <a:bodyPr wrap="square">
-            <a:spAutoFit/>
-          </a:bodyPr>
-          <a:lstStyle/>
-          <a:p>
-            <a:pPr algn="ctr">
-              <a:defRPr sz="1300" b="1">
-                <a:solidFill>
-                  <a:srgbClr val="FFFFFF"/>
-                </a:solidFill>
-                <a:latin typeface="Calibri"/>
-              </a:defRPr>
-            </a:pPr>
-            <a:r>
-              <a:t>PostgreSQL</a:t>
-            </a:r>
-          </a:p>
-        </p:txBody>
-      </p:sp>
-      <p:sp>
-        <p:nvSpPr>
-          <p:cNvPr id="16" name="TextBox 15"/>
-          <p:cNvSpPr txBox="1"/>
-          <p:nvPr/>
-        </p:nvSpPr>
-        <p:spPr>
-          <a:xfrm>
-            <a:off x="4571998" y="2011680"/>
-            <a:ext cx="1554480" cy="1828800"/>
-          </a:xfrm>
-          <a:prstGeom prst="rect">
-            <a:avLst/>
-          </a:prstGeom>
-          <a:noFill/>
-        </p:spPr>
-        <p:txBody>
-          <a:bodyPr wrap="square">
-            <a:spAutoFit/>
-          </a:bodyPr>
-          <a:lstStyle/>
-          <a:p>
-            <a:pPr algn="ctr">
-              <a:defRPr sz="1000" b="0">
-                <a:solidFill>
-                  <a:srgbClr val="4A4A4A"/>
-                </a:solidFill>
-                <a:latin typeface="Calibri"/>
-              </a:defRPr>
-            </a:pPr>
-            <a:r>
-              <a:t>Base relationnelle, queries complexes, time-box, événements Scrum</a:t>
-            </a:r>
-          </a:p>
-        </p:txBody>
-      </p:sp>
-      <p:sp>
-        <p:nvSpPr>
-          <p:cNvPr id="17" name="Rounded Rectangle 16"/>
-          <p:cNvSpPr/>
-          <p:nvPr/>
-        </p:nvSpPr>
-        <p:spPr>
-          <a:xfrm>
-            <a:off x="6355077" y="1371600"/>
-            <a:ext cx="1737360" cy="2560320"/>
-          </a:xfrm>
-          <a:prstGeom prst="roundRect">
-            <a:avLst/>
-          </a:prstGeom>
-          <a:solidFill>
-            <a:srgbClr val="F2F2F2"/>
-          </a:solidFill>
-          <a:ln>
-            <a:noFill/>
-          </a:ln>
-        </p:spPr>
-        <p:style>
-          <a:lnRef idx="1">
-            <a:schemeClr val="accent1"/>
-          </a:lnRef>
-          <a:fillRef idx="3">
-            <a:schemeClr val="accent1"/>
-          </a:fillRef>
-          <a:effectRef idx="2">
-            <a:schemeClr val="accent1"/>
-          </a:effectRef>
-          <a:fontRef idx="minor">
-            <a:schemeClr val="lt1"/>
-          </a:fontRef>
-        </p:style>
-        <p:txBody>
-          <a:bodyPr rtlCol="0" anchor="ctr"/>
-          <a:lstStyle/>
-          <a:p>
-            <a:pPr algn="ctr"/>
-          </a:p>
-        </p:txBody>
-      </p:sp>
-      <p:sp>
-        <p:nvSpPr>
-          <p:cNvPr id="18" name="Rectangle 17"/>
-          <p:cNvSpPr/>
-          <p:nvPr/>
-        </p:nvSpPr>
-        <p:spPr>
-          <a:xfrm>
-            <a:off x="6355077" y="1371600"/>
-            <a:ext cx="1737360" cy="63500"/>
-          </a:xfrm>
-          <a:prstGeom prst="rect">
-            <a:avLst/>
-          </a:prstGeom>
-          <a:solidFill>
-            <a:srgbClr val="0F6DCF"/>
-          </a:solidFill>
-          <a:ln>
-            <a:noFill/>
-          </a:ln>
-        </p:spPr>
-        <p:style>
-          <a:lnRef idx="1">
-            <a:schemeClr val="accent1"/>
-          </a:lnRef>
-          <a:fillRef idx="3">
-            <a:schemeClr val="accent1"/>
-          </a:fillRef>
-          <a:effectRef idx="2">
-            <a:schemeClr val="accent1"/>
-          </a:effectRef>
-          <a:fontRef idx="minor">
-            <a:schemeClr val="lt1"/>
-          </a:fontRef>
-        </p:style>
-        <p:txBody>
-          <a:bodyPr rtlCol="0" anchor="ctr"/>
-          <a:lstStyle/>
-          <a:p>
-            <a:pPr algn="ctr"/>
-          </a:p>
-        </p:txBody>
-      </p:sp>
-      <p:sp>
-        <p:nvSpPr>
-          <p:cNvPr id="19" name="TextBox 18"/>
-          <p:cNvSpPr txBox="1"/>
-          <p:nvPr/>
-        </p:nvSpPr>
-        <p:spPr>
-          <a:xfrm>
-            <a:off x="6446517" y="1508760"/>
-            <a:ext cx="1554480" cy="457200"/>
-          </a:xfrm>
-          <a:prstGeom prst="rect">
-            <a:avLst/>
-          </a:prstGeom>
-          <a:noFill/>
-        </p:spPr>
-        <p:txBody>
-          <a:bodyPr wrap="square">
-            <a:spAutoFit/>
-          </a:bodyPr>
-          <a:lstStyle/>
-          <a:p>
-            <a:pPr algn="ctr">
-              <a:defRPr sz="1300" b="1">
-                <a:solidFill>
-                  <a:srgbClr val="FFFFFF"/>
-                </a:solidFill>
-                <a:latin typeface="Calibri"/>
-              </a:defRPr>
-            </a:pPr>
-            <a:r>
-              <a:t>Tailwind CSS</a:t>
-            </a:r>
-          </a:p>
-        </p:txBody>
-      </p:sp>
-      <p:sp>
-        <p:nvSpPr>
-          <p:cNvPr id="20" name="TextBox 19"/>
-          <p:cNvSpPr txBox="1"/>
-          <p:nvPr/>
-        </p:nvSpPr>
-        <p:spPr>
-          <a:xfrm>
-            <a:off x="6446517" y="2011680"/>
-            <a:ext cx="1554480" cy="1828800"/>
-          </a:xfrm>
-          <a:prstGeom prst="rect">
-            <a:avLst/>
-          </a:prstGeom>
-          <a:noFill/>
-        </p:spPr>
-        <p:txBody>
-          <a:bodyPr wrap="square">
-            <a:spAutoFit/>
-          </a:bodyPr>
-          <a:lstStyle/>
-          <a:p>
-            <a:pPr algn="ctr">
-              <a:defRPr sz="1000" b="0">
-                <a:solidFill>
-                  <a:srgbClr val="4A4A4A"/>
-                </a:solidFill>
-                <a:latin typeface="Calibri"/>
-              </a:defRPr>
-            </a:pPr>
-            <a:r>
-              <a:t>Charte sand-300 / navy-900, composants UI cohérents</a:t>
-            </a:r>
-          </a:p>
-        </p:txBody>
-      </p:sp>
-      <p:sp>
-        <p:nvSpPr>
-          <p:cNvPr id="21" name="Rounded Rectangle 20"/>
-          <p:cNvSpPr/>
-          <p:nvPr/>
-        </p:nvSpPr>
-        <p:spPr>
-          <a:xfrm>
-            <a:off x="8229596" y="1371600"/>
-            <a:ext cx="1737360" cy="2560320"/>
-          </a:xfrm>
-          <a:prstGeom prst="roundRect">
-            <a:avLst/>
-          </a:prstGeom>
-          <a:solidFill>
-            <a:srgbClr val="F2F2F2"/>
-          </a:solidFill>
-          <a:ln>
-            <a:noFill/>
-          </a:ln>
-        </p:spPr>
-        <p:style>
-          <a:lnRef idx="1">
-            <a:schemeClr val="accent1"/>
-          </a:lnRef>
-          <a:fillRef idx="3">
-            <a:schemeClr val="accent1"/>
-          </a:fillRef>
-          <a:effectRef idx="2">
-            <a:schemeClr val="accent1"/>
-          </a:effectRef>
-          <a:fontRef idx="minor">
-            <a:schemeClr val="lt1"/>
-          </a:fontRef>
-        </p:style>
-        <p:txBody>
-          <a:bodyPr rtlCol="0" anchor="ctr"/>
-          <a:lstStyle/>
-          <a:p>
-            <a:pPr algn="ctr"/>
-          </a:p>
-        </p:txBody>
-      </p:sp>
-      <p:sp>
-        <p:nvSpPr>
-          <p:cNvPr id="22" name="Rectangle 21"/>
-          <p:cNvSpPr/>
-          <p:nvPr/>
-        </p:nvSpPr>
-        <p:spPr>
-          <a:xfrm>
-            <a:off x="8229596" y="1371600"/>
-            <a:ext cx="1737360" cy="63500"/>
-          </a:xfrm>
-          <a:prstGeom prst="rect">
-            <a:avLst/>
-          </a:prstGeom>
-          <a:solidFill>
-            <a:srgbClr val="651B65"/>
-          </a:solidFill>
-          <a:ln>
-            <a:noFill/>
-          </a:ln>
-        </p:spPr>
-        <p:style>
-          <a:lnRef idx="1">
-            <a:schemeClr val="accent1"/>
-          </a:lnRef>
-          <a:fillRef idx="3">
-            <a:schemeClr val="accent1"/>
-          </a:fillRef>
-          <a:effectRef idx="2">
-            <a:schemeClr val="accent1"/>
-          </a:effectRef>
-          <a:fontRef idx="minor">
-            <a:schemeClr val="lt1"/>
-          </a:fontRef>
-        </p:style>
-        <p:txBody>
-          <a:bodyPr rtlCol="0" anchor="ctr"/>
-          <a:lstStyle/>
-          <a:p>
-            <a:pPr algn="ctr"/>
-          </a:p>
-        </p:txBody>
-      </p:sp>
-      <p:sp>
-        <p:nvSpPr>
-          <p:cNvPr id="23" name="TextBox 22"/>
-          <p:cNvSpPr txBox="1"/>
-          <p:nvPr/>
-        </p:nvSpPr>
-        <p:spPr>
-          <a:xfrm>
-            <a:off x="8321036" y="1508760"/>
-            <a:ext cx="1554480" cy="457200"/>
-          </a:xfrm>
-          <a:prstGeom prst="rect">
-            <a:avLst/>
-          </a:prstGeom>
-          <a:noFill/>
-        </p:spPr>
-        <p:txBody>
-          <a:bodyPr wrap="square">
-            <a:spAutoFit/>
-          </a:bodyPr>
-          <a:lstStyle/>
-          <a:p>
-            <a:pPr algn="ctr">
-              <a:defRPr sz="1300" b="1">
-                <a:solidFill>
-                  <a:srgbClr val="FFFFFF"/>
-                </a:solidFill>
-                <a:latin typeface="Calibri"/>
-              </a:defRPr>
-            </a:pPr>
-            <a:r>
-              <a:t>React 18</a:t>
-            </a:r>
-          </a:p>
-        </p:txBody>
-      </p:sp>
-      <p:sp>
-        <p:nvSpPr>
-          <p:cNvPr id="24" name="TextBox 23"/>
-          <p:cNvSpPr txBox="1"/>
-          <p:nvPr/>
-        </p:nvSpPr>
-        <p:spPr>
-          <a:xfrm>
-            <a:off x="8321036" y="2011680"/>
-            <a:ext cx="1554480" cy="1828800"/>
-          </a:xfrm>
-          <a:prstGeom prst="rect">
-            <a:avLst/>
-          </a:prstGeom>
-          <a:noFill/>
-        </p:spPr>
-        <p:txBody>
-          <a:bodyPr wrap="square">
-            <a:spAutoFit/>
-          </a:bodyPr>
-          <a:lstStyle/>
-          <a:p>
-            <a:pPr algn="ctr">
-              <a:defRPr sz="1000" b="0">
-                <a:solidFill>
-                  <a:srgbClr val="4A4A4A"/>
-                </a:solidFill>
-                <a:latin typeface="Calibri"/>
-              </a:defRPr>
-            </a:pPr>
-            <a:r>
-              <a:t>Suspense, SearchParams, useTransition, useRouter</a:t>
-            </a:r>
-          </a:p>
-        </p:txBody>
-      </p:sp>
-      <p:sp>
-        <p:nvSpPr>
-          <p:cNvPr id="25" name="Rounded Rectangle 24"/>
-          <p:cNvSpPr/>
-          <p:nvPr/>
-        </p:nvSpPr>
-        <p:spPr>
-          <a:xfrm>
-            <a:off x="10104115" y="1371600"/>
-            <a:ext cx="1737360" cy="2560320"/>
-          </a:xfrm>
-          <a:prstGeom prst="roundRect">
-            <a:avLst/>
-          </a:prstGeom>
-          <a:solidFill>
-            <a:srgbClr val="F2F2F2"/>
-          </a:solidFill>
-          <a:ln>
-            <a:noFill/>
-          </a:ln>
-        </p:spPr>
-        <p:style>
-          <a:lnRef idx="1">
-            <a:schemeClr val="accent1"/>
-          </a:lnRef>
-          <a:fillRef idx="3">
-            <a:schemeClr val="accent1"/>
-          </a:fillRef>
-          <a:effectRef idx="2">
-            <a:schemeClr val="accent1"/>
-          </a:effectRef>
-          <a:fontRef idx="minor">
-            <a:schemeClr val="lt1"/>
-          </a:fontRef>
-        </p:style>
-        <p:txBody>
-          <a:bodyPr rtlCol="0" anchor="ctr"/>
-          <a:lstStyle/>
-          <a:p>
-            <a:pPr algn="ctr"/>
-          </a:p>
-        </p:txBody>
-      </p:sp>
-      <p:sp>
-        <p:nvSpPr>
-          <p:cNvPr id="26" name="Rectangle 25"/>
-          <p:cNvSpPr/>
-          <p:nvPr/>
-        </p:nvSpPr>
-        <p:spPr>
-          <a:xfrm>
-            <a:off x="10104115" y="1371600"/>
-            <a:ext cx="1737360" cy="63500"/>
-          </a:xfrm>
-          <a:prstGeom prst="rect">
-            <a:avLst/>
-          </a:prstGeom>
-          <a:solidFill>
-            <a:srgbClr val="336797"/>
-          </a:solidFill>
-          <a:ln>
-            <a:noFill/>
-          </a:ln>
-        </p:spPr>
-        <p:style>
-          <a:lnRef idx="1">
-            <a:schemeClr val="accent1"/>
-          </a:lnRef>
-          <a:fillRef idx="3">
-            <a:schemeClr val="accent1"/>
-          </a:fillRef>
-          <a:effectRef idx="2">
-            <a:schemeClr val="accent1"/>
-          </a:effectRef>
-          <a:fontRef idx="minor">
-            <a:schemeClr val="lt1"/>
-          </a:fontRef>
-        </p:style>
-        <p:txBody>
-          <a:bodyPr rtlCol="0" anchor="ctr"/>
-          <a:lstStyle/>
-          <a:p>
-            <a:pPr algn="ctr"/>
-          </a:p>
-        </p:txBody>
-      </p:sp>
-      <p:sp>
-        <p:nvSpPr>
-          <p:cNvPr id="27" name="TextBox 26"/>
-          <p:cNvSpPr txBox="1"/>
-          <p:nvPr/>
-        </p:nvSpPr>
-        <p:spPr>
-          <a:xfrm>
-            <a:off x="10195555" y="1508760"/>
-            <a:ext cx="1554480" cy="457200"/>
-          </a:xfrm>
-          <a:prstGeom prst="rect">
-            <a:avLst/>
-          </a:prstGeom>
-          <a:noFill/>
-        </p:spPr>
-        <p:txBody>
-          <a:bodyPr wrap="square">
-            <a:spAutoFit/>
-          </a:bodyPr>
-          <a:lstStyle/>
-          <a:p>
-            <a:pPr algn="ctr">
-              <a:defRPr sz="1300" b="1">
-                <a:solidFill>
-                  <a:srgbClr val="FFFFFF"/>
-                </a:solidFill>
-                <a:latin typeface="Calibri"/>
-              </a:defRPr>
-            </a:pPr>
-            <a:r>
-              <a:t>Node.js</a:t>
-            </a:r>
-          </a:p>
-        </p:txBody>
-      </p:sp>
-      <p:sp>
-        <p:nvSpPr>
-          <p:cNvPr id="28" name="TextBox 27"/>
-          <p:cNvSpPr txBox="1"/>
-          <p:nvPr/>
-        </p:nvSpPr>
-        <p:spPr>
-          <a:xfrm>
-            <a:off x="10195555" y="2011680"/>
-            <a:ext cx="1554480" cy="1828800"/>
-          </a:xfrm>
-          <a:prstGeom prst="rect">
-            <a:avLst/>
-          </a:prstGeom>
-          <a:noFill/>
-        </p:spPr>
-        <p:txBody>
-          <a:bodyPr wrap="square">
-            <a:spAutoFit/>
-          </a:bodyPr>
-          <a:lstStyle/>
-          <a:p>
-            <a:pPr algn="ctr">
-              <a:defRPr sz="1000" b="0">
-                <a:solidFill>
-                  <a:srgbClr val="4A4A4A"/>
-                </a:solidFill>
-                <a:latin typeface="Calibri"/>
-              </a:defRPr>
-            </a:pPr>
-            <a:r>
-              <a:t>Server Actions, authentification NextAuth v5, session JWT</a:t>
-            </a:r>
-          </a:p>
-        </p:txBody>
-      </p:sp>
-      <p:sp>
-        <p:nvSpPr>
-          <p:cNvPr id="29" name="Rectangle 28"/>
-          <p:cNvSpPr/>
-          <p:nvPr/>
-        </p:nvSpPr>
-        <p:spPr>
-          <a:xfrm>
-            <a:off x="731520" y="5029200"/>
-            <a:ext cx="10515600" cy="38100"/>
-          </a:xfrm>
-          <a:prstGeom prst="rect">
-            <a:avLst/>
-          </a:prstGeom>
-          <a:solidFill>
-            <a:srgbClr val="2C6FEA"/>
-          </a:solidFill>
-          <a:ln>
-            <a:noFill/>
-          </a:ln>
-        </p:spPr>
-        <p:style>
-          <a:lnRef idx="1">
-            <a:schemeClr val="accent1"/>
-          </a:lnRef>
-          <a:fillRef idx="3">
-            <a:schemeClr val="accent1"/>
-          </a:fillRef>
-          <a:effectRef idx="2">
-            <a:schemeClr val="accent1"/>
-          </a:effectRef>
-          <a:fontRef idx="minor">
-            <a:schemeClr val="lt1"/>
-          </a:fontRef>
-        </p:style>
-        <p:txBody>
-          <a:bodyPr rtlCol="0" anchor="ctr"/>
-          <a:lstStyle/>
-          <a:p>
-            <a:pPr algn="ctr"/>
-          </a:p>
-        </p:txBody>
-      </p:sp>
-      <p:sp>
-        <p:nvSpPr>
-          <p:cNvPr id="30" name="TextBox 29"/>
-          <p:cNvSpPr txBox="1"/>
-          <p:nvPr/>
-        </p:nvSpPr>
-        <p:spPr>
-          <a:xfrm>
-            <a:off x="731520" y="5212080"/>
-            <a:ext cx="10515600" cy="1188720"/>
-          </a:xfrm>
-          <a:prstGeom prst="rect">
-            <a:avLst/>
-          </a:prstGeom>
-          <a:noFill/>
-        </p:spPr>
-        <p:txBody>
-          <a:bodyPr wrap="square">
-            <a:spAutoFit/>
-          </a:bodyPr>
-          <a:lstStyle/>
-          <a:p>
-            <a:pPr algn="l">
-              <a:defRPr sz="1200" b="0">
-                <a:solidFill>
-                  <a:srgbClr val="2C3E50"/>
-                </a:solidFill>
-                <a:latin typeface="Calibri"/>
-              </a:defRPr>
-            </a:pPr>
-            <a:r>
-              <a:t>Aucun dépendant tiers — l'application est autonome, déploiable sur Vercel, Docker, ou auto-hébergée.</a:t>
-            </a:r>
-            <a:br/>
-            <a:r>
-              <a:t>Les données appartiennent entièrement à la structure — pas de collecte externe, pas de licence.</a:t>
-            </a:r>
-          </a:p>
-        </p:txBody>
-      </p:sp>
-    </p:spTree>
-  </p:cSld>
-  <p:clrMapOvr>
-    <a:masterClrMapping/>
-  </p:clrMapOvr>
-</p:sld>
-</file>
-
-<file path=ppt/slides/slide6.xml><?xml version="1.0" encoding="utf-8"?>
-<p:sld xmlns:a="http://schemas.openxmlformats.org/drawingml/2006/main" xmlns:p="http://schemas.openxmlformats.org/presentationml/2006/main" xmlns:r="http://schemas.openxmlformats.org/officeDocument/2006/relationships">
-  <p:cSld>
-    <p:bg>
-      <p:bgPr>
-        <a:solidFill>
-          <a:srgbClr val="FFFFFF"/>
-        </a:solidFill>
-        <a:effectLst/>
-      </p:bgPr>
-    </p:bg>
-    <p:spTree>
-      <p:nvGrpSpPr>
-        <p:cNvPr id="1" name=""/>
-        <p:cNvGrpSpPr/>
-        <p:nvPr/>
-      </p:nvGrpSpPr>
-      <p:grpSpPr/>
-      <p:sp>
-        <p:nvSpPr>
-          <p:cNvPr id="2" name="Rectangle 1"/>
-          <p:cNvSpPr/>
-          <p:nvPr/>
-        </p:nvSpPr>
-        <p:spPr>
-          <a:xfrm>
-            <a:off x="0" y="0"/>
-            <a:ext cx="12191695" cy="101600"/>
-          </a:xfrm>
-          <a:prstGeom prst="rect">
-            <a:avLst/>
-          </a:prstGeom>
-          <a:solidFill>
-            <a:srgbClr val="2C6FEA"/>
-          </a:solidFill>
-          <a:ln>
-            <a:noFill/>
-          </a:ln>
-        </p:spPr>
-        <p:style>
-          <a:lnRef idx="1">
-            <a:schemeClr val="accent1"/>
-          </a:lnRef>
-          <a:fillRef idx="3">
-            <a:schemeClr val="accent1"/>
-          </a:fillRef>
-          <a:effectRef idx="2">
-            <a:schemeClr val="accent1"/>
-          </a:effectRef>
-          <a:fontRef idx="minor">
-            <a:schemeClr val="lt1"/>
-          </a:fontRef>
-        </p:style>
-        <p:txBody>
-          <a:bodyPr rtlCol="0" anchor="ctr"/>
-          <a:lstStyle/>
-          <a:p>
-            <a:pPr algn="ctr"/>
-          </a:p>
-        </p:txBody>
-      </p:sp>
-      <p:sp>
-        <p:nvSpPr>
-          <p:cNvPr id="3" name="TextBox 2"/>
-          <p:cNvSpPr txBox="1"/>
-          <p:nvPr/>
-        </p:nvSpPr>
-        <p:spPr>
-          <a:xfrm>
-            <a:off x="731520" y="365760"/>
-            <a:ext cx="10058400" cy="640080"/>
-          </a:xfrm>
-          <a:prstGeom prst="rect">
-            <a:avLst/>
-          </a:prstGeom>
-          <a:noFill/>
-        </p:spPr>
-        <p:txBody>
-          <a:bodyPr wrap="square">
-            <a:spAutoFit/>
-          </a:bodyPr>
-          <a:lstStyle/>
-          <a:p>
-            <a:pPr algn="l">
-              <a:defRPr sz="3000" b="1">
-                <a:solidFill>
-                  <a:srgbClr val="2C3E50"/>
-                </a:solidFill>
-                <a:latin typeface="Calibri"/>
-              </a:defRPr>
-            </a:pPr>
-            <a:r>
-              <a:t>Retour sur Investissement &amp; Bénéfices</a:t>
-            </a:r>
-          </a:p>
-        </p:txBody>
-      </p:sp>
-      <p:sp>
-        <p:nvSpPr>
-          <p:cNvPr id="4" name="Rectangle 3"/>
-          <p:cNvSpPr/>
-          <p:nvPr/>
-        </p:nvSpPr>
-        <p:spPr>
-          <a:xfrm>
-            <a:off x="731520" y="1005840"/>
-            <a:ext cx="1828800" cy="50800"/>
-          </a:xfrm>
-          <a:prstGeom prst="rect">
-            <a:avLst/>
-          </a:prstGeom>
-          <a:solidFill>
-            <a:srgbClr val="2C6FEA"/>
-          </a:solidFill>
-          <a:ln>
-            <a:noFill/>
-          </a:ln>
-        </p:spPr>
-        <p:style>
-          <a:lnRef idx="1">
-            <a:schemeClr val="accent1"/>
-          </a:lnRef>
-          <a:fillRef idx="3">
-            <a:schemeClr val="accent1"/>
-          </a:fillRef>
-          <a:effectRef idx="2">
-            <a:schemeClr val="accent1"/>
-          </a:effectRef>
-          <a:fontRef idx="minor">
-            <a:schemeClr val="lt1"/>
-          </a:fontRef>
-        </p:style>
-        <p:txBody>
-          <a:bodyPr rtlCol="0" anchor="ctr"/>
-          <a:lstStyle/>
-          <a:p>
-            <a:pPr algn="ctr"/>
-          </a:p>
-        </p:txBody>
-      </p:sp>
-      <p:sp>
-        <p:nvSpPr>
-          <p:cNvPr id="5" name="Rounded Rectangle 4"/>
-          <p:cNvSpPr/>
-          <p:nvPr/>
-        </p:nvSpPr>
-        <p:spPr>
-          <a:xfrm>
-            <a:off x="731520" y="1371600"/>
-            <a:ext cx="5303520" cy="4754880"/>
-          </a:xfrm>
-          <a:prstGeom prst="roundRect">
-            <a:avLst/>
-          </a:prstGeom>
-          <a:solidFill>
-            <a:srgbClr val="F5E6D6"/>
-          </a:solidFill>
-          <a:ln>
-            <a:noFill/>
-          </a:ln>
-        </p:spPr>
-        <p:style>
-          <a:lnRef idx="1">
-            <a:schemeClr val="accent1"/>
-          </a:lnRef>
-          <a:fillRef idx="3">
-            <a:schemeClr val="accent1"/>
-          </a:fillRef>
-          <a:effectRef idx="2">
-            <a:schemeClr val="accent1"/>
-          </a:effectRef>
-          <a:fontRef idx="minor">
-            <a:schemeClr val="lt1"/>
-          </a:fontRef>
-        </p:style>
-        <p:txBody>
-          <a:bodyPr rtlCol="0" anchor="ctr"/>
-          <a:lstStyle/>
-          <a:p>
-            <a:pPr algn="ctr"/>
-          </a:p>
-        </p:txBody>
-      </p:sp>
-      <p:sp>
-        <p:nvSpPr>
-          <p:cNvPr id="6" name="Rectangle 5"/>
-          <p:cNvSpPr/>
-          <p:nvPr/>
-        </p:nvSpPr>
-        <p:spPr>
-          <a:xfrm>
-            <a:off x="731520" y="1371600"/>
-            <a:ext cx="5303520" cy="38100"/>
-          </a:xfrm>
-          <a:prstGeom prst="rect">
-            <a:avLst/>
-          </a:prstGeom>
-          <a:solidFill>
-            <a:srgbClr val="2C6FEA"/>
-          </a:solidFill>
-          <a:ln>
-            <a:noFill/>
-          </a:ln>
-        </p:spPr>
-        <p:style>
-          <a:lnRef idx="1">
-            <a:schemeClr val="accent1"/>
-          </a:lnRef>
-          <a:fillRef idx="3">
-            <a:schemeClr val="accent1"/>
-          </a:fillRef>
-          <a:effectRef idx="2">
-            <a:schemeClr val="accent1"/>
-          </a:effectRef>
-          <a:fontRef idx="minor">
-            <a:schemeClr val="lt1"/>
-          </a:fontRef>
-        </p:style>
-        <p:txBody>
-          <a:bodyPr rtlCol="0" anchor="ctr"/>
-          <a:lstStyle/>
-          <a:p>
-            <a:pPr algn="ctr"/>
-          </a:p>
-        </p:txBody>
-      </p:sp>
-      <p:sp>
-        <p:nvSpPr>
-          <p:cNvPr id="7" name="TextBox 6"/>
-          <p:cNvSpPr txBox="1"/>
-          <p:nvPr/>
-        </p:nvSpPr>
-        <p:spPr>
-          <a:xfrm>
-            <a:off x="914400" y="1554480"/>
-            <a:ext cx="4937760" cy="457200"/>
-          </a:xfrm>
-          <a:prstGeom prst="rect">
-            <a:avLst/>
-          </a:prstGeom>
-          <a:noFill/>
-        </p:spPr>
-        <p:txBody>
-          <a:bodyPr wrap="square">
-            <a:spAutoFit/>
-          </a:bodyPr>
-          <a:lstStyle/>
-          <a:p>
-            <a:pPr algn="ctr">
-              <a:defRPr sz="1600" b="1">
-                <a:solidFill>
-                  <a:srgbClr val="2C3E50"/>
-                </a:solidFill>
-                <a:latin typeface="Calibri"/>
-              </a:defRPr>
-            </a:pPr>
-            <a:r>
-              <a:t>MÉTRIQUES CLÉS</a:t>
-            </a:r>
-          </a:p>
-        </p:txBody>
-      </p:sp>
-      <p:sp>
-        <p:nvSpPr>
-          <p:cNvPr id="8" name="TextBox 7"/>
-          <p:cNvSpPr txBox="1"/>
-          <p:nvPr/>
-        </p:nvSpPr>
-        <p:spPr>
-          <a:xfrm>
-            <a:off x="914400" y="2103120"/>
-            <a:ext cx="4937760" cy="3657600"/>
-          </a:xfrm>
-          <a:prstGeom prst="rect">
-            <a:avLst/>
-          </a:prstGeom>
-          <a:noFill/>
-        </p:spPr>
-        <p:txBody>
-          <a:bodyPr wrap="square">
-            <a:spAutoFit/>
-          </a:bodyPr>
-          <a:lstStyle/>
-          <a:p>
-            <a:pPr>
+              <a:lnSpc>
+                <a:spcPct val="115000"/>
+              </a:lnSpc>
               <a:spcAft>
                 <a:spcPts val="600"/>
               </a:spcAft>
-              <a:defRPr sz="1300">
-                <a:solidFill>
-                  <a:srgbClr val="4A4A4A"/>
+            </a:pPr>
+            <a:r>
+              <a:rPr sz="1000" b="0">
+                <a:solidFill>
+                  <a:srgbClr val="475569"/>
                 </a:solidFill>
                 <a:latin typeface="Calibri"/>
-              </a:defRPr>
-            </a:pPr>
-            <a:r>
-              <a:t> ✅ Visibilité temps réel sur l'avancement des épics IA</a:t>
-            </a:r>
-          </a:p>
-          <a:p>
-            <a:pPr>
-              <a:spcAft>
-                <a:spcPts val="600"/>
-              </a:spcAft>
-              <a:defRPr sz="1300">
-                <a:solidFill>
-                  <a:srgbClr val="4A4A4A"/>
-                </a:solidFill>
-                <a:latin typeface="Calibri"/>
-              </a:defRPr>
-            </a:pPr>
-            <a:r>
-              <a:t> ✅ Suivi quotidien des Daily Scrums avec compteur automatiquement incrémenté</a:t>
-            </a:r>
-          </a:p>
-          <a:p>
-            <a:pPr>
-              <a:spcAft>
-                <a:spcPts val="600"/>
-              </a:spcAft>
-              <a:defRPr sz="1300">
-                <a:solidFill>
-                  <a:srgbClr val="4A4A4A"/>
-                </a:solidFill>
-                <a:latin typeface="Calibri"/>
-              </a:defRPr>
-            </a:pPr>
-            <a:r>
-              <a:t> ✅ Clôture définitive des Daily → débloque Sprint Review instantanément</a:t>
-            </a:r>
-          </a:p>
-          <a:p>
-            <a:pPr>
-              <a:spcAft>
-                <a:spcPts val="600"/>
-              </a:spcAft>
-              <a:defRPr sz="1300">
-                <a:solidFill>
-                  <a:srgbClr val="4A4A4A"/>
-                </a:solidFill>
-                <a:latin typeface="Calibri"/>
-              </a:defRPr>
-            </a:pPr>
-            <a:r>
-              <a:t> ✅ Deux équipes peuvent mener des sprints parallèles sur un même produit</a:t>
-            </a:r>
-          </a:p>
-          <a:p>
-            <a:pPr>
-              <a:spcAft>
-                <a:spcPts val="600"/>
-              </a:spcAft>
-              <a:defRPr sz="1300">
-                <a:solidFill>
-                  <a:srgbClr val="4A4A4A"/>
-                </a:solidFill>
-                <a:latin typeface="Calibri"/>
-              </a:defRPr>
-            </a:pPr>
-            <a:r>
-              <a:t> ✅ Sprint Review structurée : synthèse Team + retours Stakeholder séparés</a:t>
-            </a:r>
-          </a:p>
-          <a:p>
-            <a:pPr>
-              <a:spcAft>
-                <a:spcPts val="600"/>
-              </a:spcAft>
-              <a:defRPr sz="1300">
-                <a:solidFill>
-                  <a:srgbClr val="4A4A4A"/>
-                </a:solidFill>
-                <a:latin typeface="Calibri"/>
-              </a:defRPr>
-            </a:pPr>
-            <a:r>
-              <a:t> ✅ Plan d'actions rétrospective officiel, pistes Post-its persistées</a:t>
-            </a:r>
-          </a:p>
-          <a:p>
-            <a:pPr>
-              <a:spcAft>
-                <a:spcPts val="600"/>
-              </a:spcAft>
-              <a:defRPr sz="1300">
-                <a:solidFill>
-                  <a:srgbClr val="4A4A4A"/>
-                </a:solidFill>
-                <a:latin typeface="Calibri"/>
-              </a:defRPr>
-            </a:pPr>
-            <a:r>
-              <a:t> ✅ Zero licence — coût total de possession ≈ 0 après déploiement</a:t>
-            </a:r>
-          </a:p>
-        </p:txBody>
-      </p:sp>
-      <p:sp>
-        <p:nvSpPr>
-          <p:cNvPr id="9" name="Rounded Rectangle 8"/>
-          <p:cNvSpPr/>
-          <p:nvPr/>
-        </p:nvSpPr>
-        <p:spPr>
-          <a:xfrm>
-            <a:off x="6400800" y="1371600"/>
-            <a:ext cx="5303520" cy="4754880"/>
-          </a:xfrm>
-          <a:prstGeom prst="roundRect">
-            <a:avLst/>
-          </a:prstGeom>
-          <a:solidFill>
-            <a:srgbClr val="F5E6D6"/>
-          </a:solidFill>
-          <a:ln>
-            <a:noFill/>
-          </a:ln>
-        </p:spPr>
-        <p:style>
-          <a:lnRef idx="1">
-            <a:schemeClr val="accent1"/>
-          </a:lnRef>
-          <a:fillRef idx="3">
-            <a:schemeClr val="accent1"/>
-          </a:fillRef>
-          <a:effectRef idx="2">
-            <a:schemeClr val="accent1"/>
-          </a:effectRef>
-          <a:fontRef idx="minor">
-            <a:schemeClr val="lt1"/>
-          </a:fontRef>
-        </p:style>
-        <p:txBody>
-          <a:bodyPr rtlCol="0" anchor="ctr"/>
-          <a:lstStyle/>
-          <a:p>
-            <a:pPr algn="ctr"/>
-          </a:p>
-        </p:txBody>
-      </p:sp>
-      <p:sp>
-        <p:nvSpPr>
-          <p:cNvPr id="10" name="Rectangle 9"/>
-          <p:cNvSpPr/>
-          <p:nvPr/>
-        </p:nvSpPr>
-        <p:spPr>
-          <a:xfrm>
-            <a:off x="6400800" y="1371600"/>
-            <a:ext cx="5303520" cy="38100"/>
-          </a:xfrm>
-          <a:prstGeom prst="rect">
-            <a:avLst/>
-          </a:prstGeom>
-          <a:solidFill>
-            <a:srgbClr val="2C6FEA"/>
-          </a:solidFill>
-          <a:ln>
-            <a:noFill/>
-          </a:ln>
-        </p:spPr>
-        <p:style>
-          <a:lnRef idx="1">
-            <a:schemeClr val="accent1"/>
-          </a:lnRef>
-          <a:fillRef idx="3">
-            <a:schemeClr val="accent1"/>
-          </a:fillRef>
-          <a:effectRef idx="2">
-            <a:schemeClr val="accent1"/>
-          </a:effectRef>
-          <a:fontRef idx="minor">
-            <a:schemeClr val="lt1"/>
-          </a:fontRef>
-        </p:style>
-        <p:txBody>
-          <a:bodyPr rtlCol="0" anchor="ctr"/>
-          <a:lstStyle/>
-          <a:p>
-            <a:pPr algn="ctr"/>
-          </a:p>
-        </p:txBody>
-      </p:sp>
-      <p:sp>
-        <p:nvSpPr>
-          <p:cNvPr id="11" name="TextBox 10"/>
-          <p:cNvSpPr txBox="1"/>
-          <p:nvPr/>
-        </p:nvSpPr>
-        <p:spPr>
-          <a:xfrm>
-            <a:off x="6583680" y="1554480"/>
-            <a:ext cx="4937760" cy="457200"/>
-          </a:xfrm>
-          <a:prstGeom prst="rect">
-            <a:avLst/>
-          </a:prstGeom>
-          <a:noFill/>
-        </p:spPr>
-        <p:txBody>
-          <a:bodyPr wrap="square">
-            <a:spAutoFit/>
-          </a:bodyPr>
-          <a:lstStyle/>
-          <a:p>
-            <a:pPr algn="ctr">
-              <a:defRPr sz="1600" b="1">
-                <a:solidFill>
-                  <a:srgbClr val="2C3E50"/>
-                </a:solidFill>
-                <a:latin typeface="Calibri"/>
-              </a:defRPr>
-            </a:pPr>
-            <a:r>
-              <a:t>BENEFICES OPERATIONNELS</a:t>
-            </a:r>
-          </a:p>
-        </p:txBody>
-      </p:sp>
-      <p:sp>
-        <p:nvSpPr>
-          <p:cNvPr id="12" name="TextBox 11"/>
-          <p:cNvSpPr txBox="1"/>
-          <p:nvPr/>
-        </p:nvSpPr>
-        <p:spPr>
-          <a:xfrm>
-            <a:off x="6583680" y="2103120"/>
-            <a:ext cx="4937760" cy="3657600"/>
-          </a:xfrm>
-          <a:prstGeom prst="rect">
-            <a:avLst/>
-          </a:prstGeom>
-          <a:noFill/>
-        </p:spPr>
-        <p:txBody>
-          <a:bodyPr wrap="square">
-            <a:spAutoFit/>
-          </a:bodyPr>
-          <a:lstStyle/>
-          <a:p>
-            <a:pPr>
-              <a:spcAft>
-                <a:spcPts val="600"/>
-              </a:spcAft>
-              <a:defRPr sz="1300">
-                <a:solidFill>
-                  <a:srgbClr val="4A4A4A"/>
-                </a:solidFill>
-                <a:latin typeface="Calibri"/>
-              </a:defRPr>
-            </a:pPr>
-            <a:r>
-              <a:t> 🎯 Décisions basées données — chaque item, sprint, daily traçable</a:t>
-            </a:r>
-          </a:p>
-          <a:p>
-            <a:pPr>
-              <a:spcAft>
-                <a:spcPts val="600"/>
-              </a:spcAft>
-              <a:defRPr sz="1300">
-                <a:solidFill>
-                  <a:srgbClr val="4A4A4A"/>
-                </a:solidFill>
-                <a:latin typeface="Calibri"/>
-              </a:defRPr>
-            </a:pPr>
-            <a:r>
-              <a:t> 👥 Responsabilités claires : rôles PO/SM/Dev/Stakeholder respectés par garde serveur</a:t>
-            </a:r>
-          </a:p>
-          <a:p>
-            <a:pPr>
-              <a:spcAft>
-                <a:spcPts val="600"/>
-              </a:spcAft>
-              <a:defRPr sz="1300">
-                <a:solidFill>
-                  <a:srgbClr val="4A4A4A"/>
-                </a:solidFill>
-                <a:latin typeface="Calibri"/>
-              </a:defRPr>
-            </a:pPr>
-            <a:r>
-              <a:t> ⏱️ Gain de temps — pas d'outil externe, pas de synchronisation manuelle</a:t>
-            </a:r>
-          </a:p>
-          <a:p>
-            <a:pPr>
-              <a:spcAft>
-                <a:spcPts val="600"/>
-              </a:spcAft>
-              <a:defRPr sz="1300">
-                <a:solidFill>
-                  <a:srgbClr val="4A4A4A"/>
-                </a:solidFill>
-                <a:latin typeface="Calibri"/>
-              </a:defRPr>
-            </a:pPr>
-            <a:r>
-              <a:t> 📈 Qualité DoD — checklist unique partagée par toutes les équipes du produit</a:t>
-            </a:r>
-          </a:p>
-          <a:p>
-            <a:pPr>
-              <a:spcAft>
-                <a:spcPts val="600"/>
-              </a:spcAft>
-              <a:defRPr sz="1300">
-                <a:solidFill>
-                  <a:srgbClr val="4A4A4A"/>
-                </a:solidFill>
-                <a:latin typeface="Calibri"/>
-              </a:defRPr>
-            </a:pPr>
-            <a:r>
-              <a:t> 🔁 Amélioration continue — rétrospective structurée, idées d'action visibles</a:t>
-            </a:r>
-          </a:p>
-          <a:p>
-            <a:pPr>
-              <a:spcAft>
-                <a:spcPts val="600"/>
-              </a:spcAft>
-              <a:defRPr sz="1300">
-                <a:solidFill>
-                  <a:srgbClr val="4A4A4A"/>
-                </a:solidFill>
-                <a:latin typeface="Calibri"/>
-              </a:defRPr>
-            </a:pPr>
-            <a:r>
-              <a:t> 🚀 Déploiement rapide — Next.js + Prisma, prêt production en quelques minutes</a:t>
-            </a:r>
-          </a:p>
-          <a:p>
-            <a:pPr>
-              <a:spcAft>
-                <a:spcPts val="600"/>
-              </a:spcAft>
-              <a:defRPr sz="1300">
-                <a:solidFill>
-                  <a:srgbClr val="4A4A4A"/>
-                </a:solidFill>
-                <a:latin typeface="Calibri"/>
-              </a:defRPr>
-            </a:pPr>
-            <a:r>
-              <a:t> 🔒 Sécurité — données en interne, pas de fuite vers des SaaS tiers</a:t>
-            </a:r>
-          </a:p>
-        </p:txBody>
-      </p:sp>
-    </p:spTree>
-  </p:cSld>
-  <p:clrMapOvr>
-    <a:masterClrMapping/>
-  </p:clrMapOvr>
-</p:sld>
-</file>
-
-<file path=ppt/slides/slide7.xml><?xml version="1.0" encoding="utf-8"?>
-<p:sld xmlns:a="http://schemas.openxmlformats.org/drawingml/2006/main" xmlns:p="http://schemas.openxmlformats.org/presentationml/2006/main" xmlns:r="http://schemas.openxmlformats.org/officeDocument/2006/relationships">
-  <p:cSld>
-    <p:bg>
-      <p:bgPr>
-        <a:solidFill>
-          <a:srgbClr val="2C3E50"/>
-        </a:solidFill>
-        <a:effectLst/>
-      </p:bgPr>
-    </p:bg>
-    <p:spTree>
-      <p:nvGrpSpPr>
-        <p:cNvPr id="1" name=""/>
-        <p:cNvGrpSpPr/>
-        <p:nvPr/>
-      </p:nvGrpSpPr>
-      <p:grpSpPr/>
-      <p:sp>
-        <p:nvSpPr>
-          <p:cNvPr id="2" name="Rectangle 1"/>
-          <p:cNvSpPr/>
-          <p:nvPr/>
-        </p:nvSpPr>
-        <p:spPr>
-          <a:xfrm>
-            <a:off x="0" y="0"/>
-            <a:ext cx="12191695" cy="101600"/>
-          </a:xfrm>
-          <a:prstGeom prst="rect">
-            <a:avLst/>
-          </a:prstGeom>
-          <a:solidFill>
-            <a:srgbClr val="2C6FEA"/>
-          </a:solidFill>
-          <a:ln>
-            <a:noFill/>
-          </a:ln>
-        </p:spPr>
-        <p:style>
-          <a:lnRef idx="1">
-            <a:schemeClr val="accent1"/>
-          </a:lnRef>
-          <a:fillRef idx="3">
-            <a:schemeClr val="accent1"/>
-          </a:fillRef>
-          <a:effectRef idx="2">
-            <a:schemeClr val="accent1"/>
-          </a:effectRef>
-          <a:fontRef idx="minor">
-            <a:schemeClr val="lt1"/>
-          </a:fontRef>
-        </p:style>
-        <p:txBody>
-          <a:bodyPr rtlCol="0" anchor="ctr"/>
-          <a:lstStyle/>
-          <a:p>
-            <a:pPr algn="ctr"/>
-          </a:p>
-        </p:txBody>
-      </p:sp>
-      <p:sp>
-        <p:nvSpPr>
-          <p:cNvPr id="3" name="Rectangle 2"/>
-          <p:cNvSpPr/>
-          <p:nvPr/>
-        </p:nvSpPr>
-        <p:spPr>
-          <a:xfrm>
-            <a:off x="731520" y="1371600"/>
-            <a:ext cx="76200" cy="4114800"/>
-          </a:xfrm>
-          <a:prstGeom prst="rect">
-            <a:avLst/>
-          </a:prstGeom>
-          <a:solidFill>
-            <a:srgbClr val="2C6FEA"/>
-          </a:solidFill>
-          <a:ln>
-            <a:noFill/>
-          </a:ln>
-        </p:spPr>
-        <p:style>
-          <a:lnRef idx="1">
-            <a:schemeClr val="accent1"/>
-          </a:lnRef>
-          <a:fillRef idx="3">
-            <a:schemeClr val="accent1"/>
-          </a:fillRef>
-          <a:effectRef idx="2">
-            <a:schemeClr val="accent1"/>
-          </a:effectRef>
-          <a:fontRef idx="minor">
-            <a:schemeClr val="lt1"/>
-          </a:fontRef>
-        </p:style>
-        <p:txBody>
-          <a:bodyPr rtlCol="0" anchor="ctr"/>
-          <a:lstStyle/>
-          <a:p>
-            <a:pPr algn="ctr"/>
-          </a:p>
-        </p:txBody>
-      </p:sp>
-      <p:sp>
-        <p:nvSpPr>
-          <p:cNvPr id="4" name="TextBox 3"/>
-          <p:cNvSpPr txBox="1"/>
-          <p:nvPr/>
-        </p:nvSpPr>
-        <p:spPr>
-          <a:xfrm>
-            <a:off x="1371600" y="457200"/>
-            <a:ext cx="9144000" cy="731520"/>
-          </a:xfrm>
-          <a:prstGeom prst="rect">
-            <a:avLst/>
-          </a:prstGeom>
-          <a:noFill/>
-        </p:spPr>
-        <p:txBody>
-          <a:bodyPr wrap="square">
-            <a:spAutoFit/>
-          </a:bodyPr>
-          <a:lstStyle/>
-          <a:p>
-            <a:pPr algn="l">
-              <a:defRPr sz="3600" b="1">
-                <a:solidFill>
-                  <a:srgbClr val="FFFFFF"/>
-                </a:solidFill>
-                <a:latin typeface="Calibri Light"/>
-              </a:defRPr>
-            </a:pPr>
-            <a:r>
-              <a:t>Prochaines Étapes</a:t>
-            </a:r>
-          </a:p>
-        </p:txBody>
-      </p:sp>
-      <p:sp>
-        <p:nvSpPr>
-          <p:cNvPr id="5" name="Rectangle 4"/>
-          <p:cNvSpPr/>
-          <p:nvPr/>
-        </p:nvSpPr>
-        <p:spPr>
-          <a:xfrm>
-            <a:off x="1371600" y="1371600"/>
-            <a:ext cx="2743200" cy="38100"/>
-          </a:xfrm>
-          <a:prstGeom prst="rect">
-            <a:avLst/>
-          </a:prstGeom>
-          <a:solidFill>
-            <a:srgbClr val="F5E6D6"/>
-          </a:solidFill>
-          <a:ln>
-            <a:noFill/>
-          </a:ln>
-        </p:spPr>
-        <p:style>
-          <a:lnRef idx="1">
-            <a:schemeClr val="accent1"/>
-          </a:lnRef>
-          <a:fillRef idx="3">
-            <a:schemeClr val="accent1"/>
-          </a:fillRef>
-          <a:effectRef idx="2">
-            <a:schemeClr val="accent1"/>
-          </a:effectRef>
-          <a:fontRef idx="minor">
-            <a:schemeClr val="lt1"/>
-          </a:fontRef>
-        </p:style>
-        <p:txBody>
-          <a:bodyPr rtlCol="0" anchor="ctr"/>
-          <a:lstStyle/>
-          <a:p>
-            <a:pPr algn="ctr"/>
-          </a:p>
-        </p:txBody>
-      </p:sp>
-      <p:sp>
-        <p:nvSpPr>
-          <p:cNvPr id="6" name="TextBox 5"/>
-          <p:cNvSpPr txBox="1"/>
-          <p:nvPr/>
-        </p:nvSpPr>
-        <p:spPr>
-          <a:xfrm>
-            <a:off x="1371600" y="2011680"/>
-            <a:ext cx="9144000" cy="3200400"/>
-          </a:xfrm>
-          <a:prstGeom prst="rect">
-            <a:avLst/>
-          </a:prstGeom>
-          <a:noFill/>
-        </p:spPr>
-        <p:txBody>
-          <a:bodyPr wrap="square">
-            <a:spAutoFit/>
-          </a:bodyPr>
-          <a:lstStyle/>
-          <a:p>
-            <a:pPr>
-              <a:spcAft>
-                <a:spcPts val="600"/>
-              </a:spcAft>
-              <a:defRPr sz="1600">
-                <a:solidFill>
-                  <a:srgbClr val="DDDDDD"/>
-                </a:solidFill>
-                <a:latin typeface="Calibri"/>
-              </a:defRPr>
-            </a:pPr>
-            <a:r>
-              <a:t>▸ 1. Déploiement — npm run build → Vercel / Docker en &lt; 5 minutes</a:t>
-            </a:r>
-          </a:p>
-          <a:p>
-            <a:pPr>
-              <a:spcAft>
-                <a:spcPts val="600"/>
-              </a:spcAft>
-              <a:defRPr sz="1600">
-                <a:solidFill>
-                  <a:srgbClr val="DDDDDD"/>
-                </a:solidFill>
-                <a:latin typeface="Calibri"/>
-              </a:defRPr>
-            </a:pPr>
-            <a:r>
-              <a:t>▸ 2. Configuration — variables d'environnement (.env), prisma db push</a:t>
-            </a:r>
-          </a:p>
-          <a:p>
-            <a:pPr>
-              <a:spcAft>
-                <a:spcPts val="600"/>
-              </a:spcAft>
-              <a:defRPr sz="1600">
-                <a:solidFill>
-                  <a:srgbClr val="DDDDDD"/>
-                </a:solidFill>
-                <a:latin typeface="Calibri"/>
-              </a:defRPr>
-            </a:pPr>
-            <a:r>
-              <a:t>▸ 3. Seed initial — npm run seed pour créer les 4 comptes démo</a:t>
-            </a:r>
-          </a:p>
-          <a:p>
-            <a:pPr>
-              <a:spcAft>
-                <a:spcPts val="600"/>
-              </a:spcAft>
-              <a:defRPr sz="1600">
-                <a:solidFill>
-                  <a:srgbClr val="DDDDDD"/>
-                </a:solidFill>
-                <a:latin typeface="Calibri"/>
-              </a:defRPr>
-            </a:pPr>
-            <a:r>
-              <a:t>▸ 4. Formation rapide — 1h pour PO/SM : interface et gardes</a:t>
-            </a:r>
-          </a:p>
-          <a:p>
-            <a:pPr>
-              <a:spcAft>
-                <a:spcPts val="600"/>
-              </a:spcAft>
-              <a:defRPr sz="1600">
-                <a:solidFill>
-                  <a:srgbClr val="DDDDDD"/>
-                </a:solidFill>
-                <a:latin typeface="Calibri"/>
-              </a:defRPr>
-            </a:pPr>
-            <a:r>
-              <a:t>▸ 5. Premier sprint — création produit, équipe, backlog d'épics IA</a:t>
-            </a:r>
-          </a:p>
-          <a:p>
-            <a:pPr>
-              <a:spcAft>
-                <a:spcPts val="600"/>
-              </a:spcAft>
-              <a:defRPr sz="1600">
-                <a:solidFill>
-                  <a:srgbClr val="DDDDDD"/>
-                </a:solidFill>
-                <a:latin typeface="Calibri"/>
-              </a:defRPr>
-            </a:pPr>
-            <a:r>
-              <a:t>▸ 6. Suivi — laisser la cascade auto-produit→équipe→sprint agir</a:t>
-            </a:r>
-          </a:p>
-        </p:txBody>
-      </p:sp>
-      <p:sp>
-        <p:nvSpPr>
-          <p:cNvPr id="7" name="Rounded Rectangle 6"/>
-          <p:cNvSpPr/>
-          <p:nvPr/>
-        </p:nvSpPr>
-        <p:spPr>
-          <a:xfrm>
-            <a:off x="1371600" y="5029200"/>
-            <a:ext cx="9418320" cy="1097280"/>
-          </a:xfrm>
-          <a:prstGeom prst="roundRect">
-            <a:avLst/>
-          </a:prstGeom>
-          <a:solidFill>
-            <a:srgbClr val="2C6FEA"/>
-          </a:solidFill>
-          <a:ln>
-            <a:noFill/>
-          </a:ln>
-        </p:spPr>
-        <p:style>
-          <a:lnRef idx="1">
-            <a:schemeClr val="accent1"/>
-          </a:lnRef>
-          <a:fillRef idx="3">
-            <a:schemeClr val="accent1"/>
-          </a:fillRef>
-          <a:effectRef idx="2">
-            <a:schemeClr val="accent1"/>
-          </a:effectRef>
-          <a:fontRef idx="minor">
-            <a:schemeClr val="lt1"/>
-          </a:fontRef>
-        </p:style>
-        <p:txBody>
-          <a:bodyPr rtlCol="0" anchor="ctr"/>
-          <a:lstStyle/>
-          <a:p>
-            <a:pPr algn="ctr"/>
-          </a:p>
-        </p:txBody>
-      </p:sp>
-      <p:sp>
-        <p:nvSpPr>
-          <p:cNvPr id="8" name="TextBox 7"/>
-          <p:cNvSpPr txBox="1"/>
-          <p:nvPr/>
-        </p:nvSpPr>
-        <p:spPr>
-          <a:xfrm>
-            <a:off x="1645920" y="5120640"/>
-            <a:ext cx="8869680" cy="914400"/>
-          </a:xfrm>
-          <a:prstGeom prst="rect">
-            <a:avLst/>
-          </a:prstGeom>
-          <a:noFill/>
-        </p:spPr>
-        <p:txBody>
-          <a:bodyPr wrap="square">
-            <a:spAutoFit/>
-          </a:bodyPr>
-          <a:lstStyle/>
-          <a:p>
-            <a:pPr algn="ctr">
-              <a:defRPr sz="1500" b="1">
-                <a:solidFill>
-                  <a:srgbClr val="FFFFFF"/>
-                </a:solidFill>
-                <a:latin typeface="Calibri"/>
-              </a:defRPr>
-            </a:pPr>
-            <a:r>
-              <a:t>Prêt à offrir à votre Direction Data &amp; IA un outil Scrum natif, gratuit, et parfaitement adapté ?</a:t>
-            </a:r>
-          </a:p>
-        </p:txBody>
-      </p:sp>
-      <p:sp>
-        <p:nvSpPr>
-          <p:cNvPr id="9" name="TextBox 8"/>
-          <p:cNvSpPr txBox="1"/>
-          <p:nvPr/>
-        </p:nvSpPr>
-        <p:spPr>
-          <a:xfrm>
-            <a:off x="1371600" y="6217920"/>
-            <a:ext cx="9144000" cy="457200"/>
-          </a:xfrm>
-          <a:prstGeom prst="rect">
-            <a:avLst/>
-          </a:prstGeom>
-          <a:noFill/>
-        </p:spPr>
-        <p:txBody>
-          <a:bodyPr wrap="square">
-            <a:spAutoFit/>
-          </a:bodyPr>
-          <a:lstStyle/>
-          <a:p>
-            <a:pPr algn="ctr">
-              <a:defRPr sz="1300" b="0">
-                <a:solidFill>
-                  <a:srgbClr val="88AACC"/>
-                </a:solidFill>
-                <a:latin typeface="Calibri"/>
-              </a:defRPr>
-            </a:pPr>
-            <a:r>
-              <a:t>ScrumFirst — Parce que chaque équipe Data mérite de scrummer à la hauteur de ses défis IA</a:t>
+              </a:rPr>
+              <a:t>ScrumFirst  |  Direction Data &amp; Intelligence Artificielle</a:t>
             </a:r>
           </a:p>
         </p:txBody>
